--- a/builder/assets/reference-pages/marimekko.pptx
+++ b/builder/assets/reference-pages/marimekko.pptx
@@ -1097,7 +1097,7 @@
                   <a:srgbClr val="15375F"/>
                 </a:solidFill>
               </a:rPr>
-              <a:t>56% 的市场集中在两个细分，但我方份额不足 8%</a:t>
+              <a:t>56% The market is concentrated in two segments, but our share is insufficient 8%</a:t>
             </a:r>
           </a:p>
         </p:txBody>
@@ -1653,7 +1653,7 @@
                   <a:srgbClr val="FFFFFF"/>
                 </a:solidFill>
               </a:rPr>
-              <a:t>对手 A 38%</a:t>
+              <a:t>opponent A 38%</a:t>
             </a:r>
           </a:p>
         </p:txBody>
@@ -1736,7 +1736,7 @@
                   <a:srgbClr val="FFFFFF"/>
                 </a:solidFill>
               </a:rPr>
-              <a:t>对手 B 25%</a:t>
+              <a:t>opponent B 25%</a:t>
             </a:r>
           </a:p>
         </p:txBody>
@@ -1819,7 +1819,7 @@
                   <a:srgbClr val="172033"/>
                 </a:solidFill>
               </a:rPr>
-              <a:t>其他 30%</a:t>
+              <a:t>Others 30%</a:t>
             </a:r>
           </a:p>
         </p:txBody>
@@ -1869,7 +1869,7 @@
                   <a:srgbClr val="E8872D"/>
                 </a:solidFill>
               </a:rPr>
-              <a:t>¥38 亿</a:t>
+              <a:t>¥38 billion</a:t>
             </a:r>
           </a:p>
           <a:p xmlns:a="http://schemas.openxmlformats.org/drawingml/2006/main">
@@ -1936,7 +1936,7 @@
                   <a:srgbClr val="E8872D"/>
                 </a:solidFill>
               </a:rPr>
-              <a:t>大型企业</a:t>
+              <a:t>large enterprise</a:t>
             </a:r>
           </a:p>
           <a:p xmlns:a="http://schemas.openxmlformats.org/drawingml/2006/main">
@@ -2100,7 +2100,7 @@
                   <a:srgbClr val="FFFFFF"/>
                 </a:solidFill>
               </a:rPr>
-              <a:t>对手 A 34%</a:t>
+              <a:t>opponent A 34%</a:t>
             </a:r>
           </a:p>
         </p:txBody>
@@ -2183,7 +2183,7 @@
                   <a:srgbClr val="FFFFFF"/>
                 </a:solidFill>
               </a:rPr>
-              <a:t>对手 B 28%</a:t>
+              <a:t>opponent B 28%</a:t>
             </a:r>
           </a:p>
         </p:txBody>
@@ -2266,7 +2266,7 @@
                   <a:srgbClr val="172033"/>
                 </a:solidFill>
               </a:rPr>
-              <a:t>其他 30%</a:t>
+              <a:t>Others 30%</a:t>
             </a:r>
           </a:p>
         </p:txBody>
@@ -2316,7 +2316,7 @@
                   <a:srgbClr val="E8872D"/>
                 </a:solidFill>
               </a:rPr>
-              <a:t>¥29 亿</a:t>
+              <a:t>¥29 billion</a:t>
             </a:r>
           </a:p>
           <a:p xmlns:a="http://schemas.openxmlformats.org/drawingml/2006/main">
@@ -2383,7 +2383,7 @@
                   <a:srgbClr val="E8872D"/>
                 </a:solidFill>
               </a:rPr>
-              <a:t>中型企业</a:t>
+              <a:t>medium-sized enterprise</a:t>
             </a:r>
           </a:p>
           <a:p xmlns:a="http://schemas.openxmlformats.org/drawingml/2006/main">
@@ -2514,7 +2514,7 @@
                   <a:srgbClr val="FFFFFF"/>
                 </a:solidFill>
               </a:rPr>
-              <a:t>我方 14%</a:t>
+              <a:t>Our side 14%</a:t>
             </a:r>
           </a:p>
         </p:txBody>
@@ -2597,7 +2597,7 @@
                   <a:srgbClr val="FFFFFF"/>
                 </a:solidFill>
               </a:rPr>
-              <a:t>对手 A 28%</a:t>
+              <a:t>opponent A 28%</a:t>
             </a:r>
           </a:p>
         </p:txBody>
@@ -2680,7 +2680,7 @@
                   <a:srgbClr val="FFFFFF"/>
                 </a:solidFill>
               </a:rPr>
-              <a:t>对手 B 24%</a:t>
+              <a:t>opponent B 24%</a:t>
             </a:r>
           </a:p>
         </p:txBody>
@@ -2763,7 +2763,7 @@
                   <a:srgbClr val="172033"/>
                 </a:solidFill>
               </a:rPr>
-              <a:t>其他 34%</a:t>
+              <a:t>Others 34%</a:t>
             </a:r>
           </a:p>
         </p:txBody>
@@ -2813,7 +2813,7 @@
                   <a:srgbClr val="15375F"/>
                 </a:solidFill>
               </a:rPr>
-              <a:t>¥22 亿</a:t>
+              <a:t>¥22 billion</a:t>
             </a:r>
           </a:p>
           <a:p xmlns:a="http://schemas.openxmlformats.org/drawingml/2006/main">
@@ -2880,7 +2880,7 @@
                   <a:srgbClr val="172033"/>
                 </a:solidFill>
               </a:rPr>
-              <a:t>小微企业</a:t>
+              <a:t>Small and micro enterprises</a:t>
             </a:r>
           </a:p>
           <a:p xmlns:a="http://schemas.openxmlformats.org/drawingml/2006/main">
@@ -3013,7 +3013,7 @@
                   <a:srgbClr val="FFFFFF"/>
                 </a:solidFill>
               </a:rPr>
-              <a:t>对手 A 31%</a:t>
+              <a:t>opponent A 31%</a:t>
             </a:r>
           </a:p>
         </p:txBody>
@@ -3096,7 +3096,7 @@
                   <a:srgbClr val="FFFFFF"/>
                 </a:solidFill>
               </a:rPr>
-              <a:t>对手 B 22%</a:t>
+              <a:t>opponent B 22%</a:t>
             </a:r>
           </a:p>
         </p:txBody>
@@ -3179,7 +3179,7 @@
                   <a:srgbClr val="172033"/>
                 </a:solidFill>
               </a:rPr>
-              <a:t>其他 36%</a:t>
+              <a:t>Others 36%</a:t>
             </a:r>
           </a:p>
         </p:txBody>
@@ -3229,7 +3229,7 @@
                   <a:srgbClr val="15375F"/>
                 </a:solidFill>
               </a:rPr>
-              <a:t>¥18 亿</a:t>
+              <a:t>¥18 billion</a:t>
             </a:r>
           </a:p>
           <a:p xmlns:a="http://schemas.openxmlformats.org/drawingml/2006/main">
@@ -3296,7 +3296,7 @@
                   <a:srgbClr val="172033"/>
                 </a:solidFill>
               </a:rPr>
-              <a:t>政企</a:t>
+              <a:t>Government and enterprise</a:t>
             </a:r>
           </a:p>
           <a:p xmlns:a="http://schemas.openxmlformats.org/drawingml/2006/main">
@@ -3396,7 +3396,7 @@
                   <a:srgbClr val="FFFFFF"/>
                 </a:solidFill>
               </a:rPr>
-              <a:t>我方 18%</a:t>
+              <a:t>Our side 18%</a:t>
             </a:r>
           </a:p>
         </p:txBody>
@@ -3479,7 +3479,7 @@
                   <a:srgbClr val="FFFFFF"/>
                 </a:solidFill>
               </a:rPr>
-              <a:t>对手 A 25%</a:t>
+              <a:t>opponent A 25%</a:t>
             </a:r>
           </a:p>
         </p:txBody>
@@ -3562,7 +3562,7 @@
                   <a:srgbClr val="FFFFFF"/>
                 </a:solidFill>
               </a:rPr>
-              <a:t>对手 B 20%</a:t>
+              <a:t>opponent B 20%</a:t>
             </a:r>
           </a:p>
         </p:txBody>
@@ -3645,7 +3645,7 @@
                   <a:srgbClr val="172033"/>
                 </a:solidFill>
               </a:rPr>
-              <a:t>其他 37%</a:t>
+              <a:t>Others 37%</a:t>
             </a:r>
           </a:p>
         </p:txBody>
@@ -3695,7 +3695,7 @@
                   <a:srgbClr val="15375F"/>
                 </a:solidFill>
               </a:rPr>
-              <a:t>¥13 亿</a:t>
+              <a:t>¥13 billion</a:t>
             </a:r>
           </a:p>
           <a:p xmlns:a="http://schemas.openxmlformats.org/drawingml/2006/main">
@@ -3762,7 +3762,7 @@
                   <a:srgbClr val="172033"/>
                 </a:solidFill>
               </a:rPr>
-              <a:t>个人</a:t>
+              <a:t>personal</a:t>
             </a:r>
           </a:p>
           <a:p xmlns:a="http://schemas.openxmlformats.org/drawingml/2006/main">
@@ -3786,7 +3786,7 @@
       </p:sp>
       <p:sp>
         <p:nvSpPr>
-          <p:cNvPr id="62" name="关键洞察-rail">
+          <p:cNvPr id="62" name="key insights-rail">
             <a:extLst xmlns:a="http://schemas.openxmlformats.org/drawingml/2006/main">
               <a:ext uri="{FF2B5EF4-FFF2-40B4-BE49-F238E27FC236}">
                 <a16:creationId xmlns:a16="http://schemas.microsoft.com/office/drawing/2014/main" id="{F8648E36-7997-4A18-ABCD-F3B28F87B651}"/>
@@ -3821,7 +3821,7 @@
       </p:sp>
       <p:sp>
         <p:nvSpPr>
-          <p:cNvPr id="63" name="关键洞察-title">
+          <p:cNvPr id="63" name="key insights-title">
             <a:extLst xmlns:a="http://schemas.openxmlformats.org/drawingml/2006/main">
               <a:ext uri="{FF2B5EF4-FFF2-40B4-BE49-F238E27FC236}">
                 <a16:creationId xmlns:a16="http://schemas.microsoft.com/office/drawing/2014/main" id="{087E3AE0-394C-4CAC-AF86-5F33ED77E086}"/>
@@ -3864,14 +3864,14 @@
                   <a:srgbClr val="15375F"/>
                 </a:solidFill>
               </a:rPr>
-              <a:t>关键洞察</a:t>
-            </a:r>
-          </a:p>
-        </p:txBody>
-      </p:sp>
-      <p:sp>
-        <p:nvSpPr>
-          <p:cNvPr id="64" name="关键洞察-item-1">
+              <a:t>key insights</a:t>
+            </a:r>
+          </a:p>
+        </p:txBody>
+      </p:sp>
+      <p:sp>
+        <p:nvSpPr>
+          <p:cNvPr id="64" name="key insights-item-1">
             <a:extLst xmlns:a="http://schemas.openxmlformats.org/drawingml/2006/main">
               <a:ext uri="{FF2B5EF4-FFF2-40B4-BE49-F238E27FC236}">
                 <a16:creationId xmlns:a16="http://schemas.microsoft.com/office/drawing/2014/main" id="{AD7423E0-6C04-41B7-952C-742712F0BFCE}"/>
@@ -3920,14 +3920,14 @@
                   <a:srgbClr val="172033"/>
                 </a:solidFill>
               </a:rPr>
-              <a:t>大型与中型企业占市场 56%</a:t>
-            </a:r>
-          </a:p>
-        </p:txBody>
-      </p:sp>
-      <p:sp>
-        <p:nvSpPr>
-          <p:cNvPr id="65" name="关键洞察-item-2">
+              <a:t>Large and medium-sized enterprises occupy the market 56%</a:t>
+            </a:r>
+          </a:p>
+        </p:txBody>
+      </p:sp>
+      <p:sp>
+        <p:nvSpPr>
+          <p:cNvPr id="65" name="key insights-item-2">
             <a:extLst xmlns:a="http://schemas.openxmlformats.org/drawingml/2006/main">
               <a:ext uri="{FF2B5EF4-FFF2-40B4-BE49-F238E27FC236}">
                 <a16:creationId xmlns:a16="http://schemas.microsoft.com/office/drawing/2014/main" id="{A31C880D-D454-46F4-8156-E09C92B3384A}"/>
@@ -3976,14 +3976,14 @@
                   <a:srgbClr val="172033"/>
                 </a:solidFill>
               </a:rPr>
-              <a:t>我方在两大细分份额均低于 8%</a:t>
-            </a:r>
-          </a:p>
-        </p:txBody>
-      </p:sp>
-      <p:sp>
-        <p:nvSpPr>
-          <p:cNvPr id="66" name="关键洞察-item-3">
+              <a:t>Our share in both major segments is lower than 8%</a:t>
+            </a:r>
+          </a:p>
+        </p:txBody>
+      </p:sp>
+      <p:sp>
+        <p:nvSpPr>
+          <p:cNvPr id="66" name="key insights-item-3">
             <a:extLst xmlns:a="http://schemas.openxmlformats.org/drawingml/2006/main">
               <a:ext uri="{FF2B5EF4-FFF2-40B4-BE49-F238E27FC236}">
                 <a16:creationId xmlns:a16="http://schemas.microsoft.com/office/drawing/2014/main" id="{95C60500-730F-4D95-9C8A-73B5DB7A64A3}"/>
@@ -4032,7 +4032,7 @@
                   <a:srgbClr val="172033"/>
                 </a:solidFill>
               </a:rPr>
-              <a:t>优先投入两大细分可覆盖主要增长空间</a:t>
+              <a:t>Prioritizing investment in two major segments can cover the main growth space</a:t>
             </a:r>
           </a:p>
         </p:txBody>
@@ -4088,7 +4088,7 @@
                   <a:srgbClr val="15375F"/>
                 </a:solidFill>
               </a:rPr>
-              <a:t>资源优先转向大型与中型企业细分</a:t>
+              <a:t>Resource priority is shifted to the segmentation of large and medium-sized enterprises</a:t>
             </a:r>
           </a:p>
         </p:txBody>

--- a/builder/assets/reference-pages/marimekko.pptx
+++ b/builder/assets/reference-pages/marimekko.pptx
@@ -2,13 +2,13 @@
 <file path=ppt/presentation.xml><?xml version="1.0" encoding="utf-8"?>
 <p:presentation xmlns:p="http://schemas.openxmlformats.org/presentationml/2006/main">
   <p:sldMasterIdLst>
-    <p:sldMasterId xmlns:r="http://schemas.openxmlformats.org/officeDocument/2006/relationships" id="2147483648" r:id="R27f2e3398ed14bf9"/>
+    <p:sldMasterId xmlns:r="http://schemas.openxmlformats.org/officeDocument/2006/relationships" id="2147483648" r:id="R6661503b5e434065"/>
   </p:sldMasterIdLst>
   <p:notesMasterIdLst>
-    <p:notesMasterId xmlns:r="http://schemas.openxmlformats.org/officeDocument/2006/relationships" r:id="R322bfc7488434f93"/>
+    <p:notesMasterId xmlns:r="http://schemas.openxmlformats.org/officeDocument/2006/relationships" r:id="R8008d85d826d4996"/>
   </p:notesMasterIdLst>
   <p:sldIdLst>
-    <p:sldId xmlns:r="http://schemas.openxmlformats.org/officeDocument/2006/relationships" id="256" r:id="R1f5da4617f5c474b"/>
+    <p:sldId xmlns:r="http://schemas.openxmlformats.org/officeDocument/2006/relationships" id="256" r:id="R70947db81370474c"/>
   </p:sldIdLst>
   <p:sldSz cx="12192000" cy="6858000"/>
   <p:notesSz cx="6858000" cy="9144000"/>
@@ -506,7 +506,7 @@
   </p:cSld>
   <p:clrMap bg1="lt1" tx1="dk1" bg2="lt2" tx2="dk2" accent1="accent1" accent2="accent2" accent3="accent3" accent4="accent4" accent5="accent5" accent6="accent6" hlink="hlink" folHlink="folHlink"/>
   <p:sldLayoutIdLst>
-    <p:sldLayoutId xmlns:r="http://schemas.openxmlformats.org/officeDocument/2006/relationships" id="2147483649" r:id="Raf3e971445584b14"/>
+    <p:sldLayoutId xmlns:r="http://schemas.openxmlformats.org/officeDocument/2006/relationships" id="2147483649" r:id="R876694dcf01c4c6e"/>
   </p:sldLayoutIdLst>
   <p:txStyles>
     <p:titleStyle>
@@ -1054,10 +1054,10 @@
       </p:grpSpPr>
       <p:sp>
         <p:nvSpPr>
-          <p:cNvPr id="68" name="page-title">
-            <a:extLst xmlns:a="http://schemas.openxmlformats.org/drawingml/2006/main">
-              <a:ext uri="{FF2B5EF4-FFF2-40B4-BE49-F238E27FC236}">
-                <a16:creationId xmlns:a16="http://schemas.microsoft.com/office/drawing/2014/main" id="{1A870211-241E-4268-8FD7-00A8E32FDC3D}"/>
+          <p:cNvPr id="58" name="page-title">
+            <a:extLst xmlns:a="http://schemas.openxmlformats.org/drawingml/2006/main">
+              <a:ext uri="{FF2B5EF4-FFF2-40B4-BE49-F238E27FC236}">
+                <a16:creationId xmlns:a16="http://schemas.microsoft.com/office/drawing/2014/main" id="{4CBDE7D6-20FA-4335-A8C6-F890FDD9F827}"/>
               </a:ext>
             </a:extLst>
           </p:cNvPr>
@@ -1081,18 +1081,20 @@
           </a:ln>
         </p:spPr>
         <p:txBody>
-          <a:bodyPr xmlns:a="http://schemas.openxmlformats.org/drawingml/2006/main" anchor="ctr"/>
+          <a:bodyPr xmlns:a="http://schemas.openxmlformats.org/drawingml/2006/main" wrap="square" lIns="38100" tIns="19050" rIns="38100" bIns="19050" anchor="ctr">
+            <a:noAutofit/>
+          </a:bodyPr>
           <a:lstStyle xmlns:a="http://schemas.openxmlformats.org/drawingml/2006/main"/>
           <a:p xmlns:a="http://schemas.openxmlformats.org/drawingml/2006/main">
             <a:pPr algn="l">
-              <a:defRPr sz="2550" b="1">
+              <a:defRPr sz="3000" b="1">
                 <a:solidFill>
                   <a:srgbClr val="15375F"/>
                 </a:solidFill>
               </a:defRPr>
             </a:pPr>
             <a:r>
-              <a:rPr sz="2550" b="1">
+              <a:rPr sz="3000" b="1">
                 <a:solidFill>
                   <a:srgbClr val="15375F"/>
                 </a:solidFill>
@@ -1107,7 +1109,7 @@
           <p:cNvPr id="2" name="mekko-frame">
             <a:extLst xmlns:a="http://schemas.openxmlformats.org/drawingml/2006/main">
               <a:ext uri="{FF2B5EF4-FFF2-40B4-BE49-F238E27FC236}">
-                <a16:creationId xmlns:a16="http://schemas.microsoft.com/office/drawing/2014/main" id="{612217EC-2EA9-4AE0-BB8F-78FAEC529AE7}"/>
+                <a16:creationId xmlns:a16="http://schemas.microsoft.com/office/drawing/2014/main" id="{E7416673-6EEF-485A-86AF-ACDA0009DFD9}"/>
               </a:ext>
             </a:extLst>
           </p:cNvPr>
@@ -1121,10 +1123,8 @@
             <a:off x="590550" y="1352550"/>
             <a:ext cx="8096250" cy="4095750"/>
           </a:xfrm>
-          <a:prstGeom xmlns:a="http://schemas.openxmlformats.org/drawingml/2006/main" prst="roundRect">
-            <a:avLst>
-              <a:gd name="adj" fmla="val 1860"/>
-            </a:avLst>
+          <a:prstGeom xmlns:a="http://schemas.openxmlformats.org/drawingml/2006/main" prst="rect">
+            <a:avLst/>
           </a:prstGeom>
           <a:solidFill xmlns:a="http://schemas.openxmlformats.org/drawingml/2006/main">
             <a:srgbClr val="FFFFFF"/>
@@ -1142,7 +1142,7 @@
           <p:cNvPr id="3" name="mekko-grid-0">
             <a:extLst xmlns:a="http://schemas.openxmlformats.org/drawingml/2006/main">
               <a:ext uri="{FF2B5EF4-FFF2-40B4-BE49-F238E27FC236}">
-                <a16:creationId xmlns:a16="http://schemas.microsoft.com/office/drawing/2014/main" id="{17E84613-7AB0-47C8-BC65-FDB2C3785B66}"/>
+                <a16:creationId xmlns:a16="http://schemas.microsoft.com/office/drawing/2014/main" id="{9F4C8282-56B9-423F-BC82-9136CCBECDE0}"/>
               </a:ext>
             </a:extLst>
           </p:cNvPr>
@@ -1173,19 +1173,19 @@
           <p:cNvPr id="4" name="mekko-tick-0">
             <a:extLst xmlns:a="http://schemas.openxmlformats.org/drawingml/2006/main">
               <a:ext uri="{FF2B5EF4-FFF2-40B4-BE49-F238E27FC236}">
-                <a16:creationId xmlns:a16="http://schemas.microsoft.com/office/drawing/2014/main" id="{43504409-393C-45FF-8AA5-AC91846C32F7}"/>
-              </a:ext>
-            </a:extLst>
-          </p:cNvPr>
-          <p:cNvSpPr>
-            <a:spLocks xmlns:a="http://schemas.openxmlformats.org/drawingml/2006/main" noGrp="1"/>
-          </p:cNvSpPr>
-          <p:nvPr/>
-        </p:nvSpPr>
-        <p:spPr>
-          <a:xfrm xmlns:a="http://schemas.openxmlformats.org/drawingml/2006/main">
-            <a:off x="628650" y="1866900"/>
-            <a:ext cx="419100" cy="228600"/>
+                <a16:creationId xmlns:a16="http://schemas.microsoft.com/office/drawing/2014/main" id="{A5B5CF33-7543-4906-B745-BD56B46B5F9A}"/>
+              </a:ext>
+            </a:extLst>
+          </p:cNvPr>
+          <p:cNvSpPr>
+            <a:spLocks xmlns:a="http://schemas.openxmlformats.org/drawingml/2006/main" noGrp="1"/>
+          </p:cNvSpPr>
+          <p:nvPr/>
+        </p:nvSpPr>
+        <p:spPr>
+          <a:xfrm xmlns:a="http://schemas.openxmlformats.org/drawingml/2006/main">
+            <a:off x="247650" y="1866900"/>
+            <a:ext cx="857250" cy="228600"/>
           </a:xfrm>
           <a:prstGeom xmlns:a="http://schemas.openxmlformats.org/drawingml/2006/main" prst="rect">
             <a:avLst/>
@@ -1197,7 +1197,9 @@
           </a:ln>
         </p:spPr>
         <p:txBody>
-          <a:bodyPr xmlns:a="http://schemas.openxmlformats.org/drawingml/2006/main" anchor="ctr"/>
+          <a:bodyPr xmlns:a="http://schemas.openxmlformats.org/drawingml/2006/main" wrap="square" lIns="38100" tIns="19050" rIns="38100" bIns="19050" anchor="ctr">
+            <a:noAutofit/>
+          </a:bodyPr>
           <a:lstStyle xmlns:a="http://schemas.openxmlformats.org/drawingml/2006/main"/>
           <a:p xmlns:a="http://schemas.openxmlformats.org/drawingml/2006/main">
             <a:pPr algn="r">
@@ -1213,7 +1215,7 @@
                   <a:srgbClr val="697386"/>
                 </a:solidFill>
               </a:rPr>
-              <a:t>100%</a:t>
+              <a:t>¥38亿</a:t>
             </a:r>
           </a:p>
         </p:txBody>
@@ -1223,7 +1225,7 @@
           <p:cNvPr id="5" name="mekko-grid-1">
             <a:extLst xmlns:a="http://schemas.openxmlformats.org/drawingml/2006/main">
               <a:ext uri="{FF2B5EF4-FFF2-40B4-BE49-F238E27FC236}">
-                <a16:creationId xmlns:a16="http://schemas.microsoft.com/office/drawing/2014/main" id="{ADA22179-A064-4265-81BC-5D333CCB9EBF}"/>
+                <a16:creationId xmlns:a16="http://schemas.microsoft.com/office/drawing/2014/main" id="{BB9C48EA-65B1-4A73-BEC7-5FCDE9FD7F88}"/>
               </a:ext>
             </a:extLst>
           </p:cNvPr>
@@ -1254,19 +1256,19 @@
           <p:cNvPr id="6" name="mekko-tick-1">
             <a:extLst xmlns:a="http://schemas.openxmlformats.org/drawingml/2006/main">
               <a:ext uri="{FF2B5EF4-FFF2-40B4-BE49-F238E27FC236}">
-                <a16:creationId xmlns:a16="http://schemas.microsoft.com/office/drawing/2014/main" id="{CF98E80D-E21A-40BE-B5E1-C83DD9EC2DD1}"/>
-              </a:ext>
-            </a:extLst>
-          </p:cNvPr>
-          <p:cNvSpPr>
-            <a:spLocks xmlns:a="http://schemas.openxmlformats.org/drawingml/2006/main" noGrp="1"/>
-          </p:cNvSpPr>
-          <p:nvPr/>
-        </p:nvSpPr>
-        <p:spPr>
-          <a:xfrm xmlns:a="http://schemas.openxmlformats.org/drawingml/2006/main">
-            <a:off x="628650" y="2605088"/>
-            <a:ext cx="419100" cy="228600"/>
+                <a16:creationId xmlns:a16="http://schemas.microsoft.com/office/drawing/2014/main" id="{A6FEDFF1-37F3-4509-987B-A12E5D54AE32}"/>
+              </a:ext>
+            </a:extLst>
+          </p:cNvPr>
+          <p:cNvSpPr>
+            <a:spLocks xmlns:a="http://schemas.openxmlformats.org/drawingml/2006/main" noGrp="1"/>
+          </p:cNvSpPr>
+          <p:nvPr/>
+        </p:nvSpPr>
+        <p:spPr>
+          <a:xfrm xmlns:a="http://schemas.openxmlformats.org/drawingml/2006/main">
+            <a:off x="247650" y="2605088"/>
+            <a:ext cx="857250" cy="228600"/>
           </a:xfrm>
           <a:prstGeom xmlns:a="http://schemas.openxmlformats.org/drawingml/2006/main" prst="rect">
             <a:avLst/>
@@ -1278,7 +1280,9 @@
           </a:ln>
         </p:spPr>
         <p:txBody>
-          <a:bodyPr xmlns:a="http://schemas.openxmlformats.org/drawingml/2006/main" anchor="ctr"/>
+          <a:bodyPr xmlns:a="http://schemas.openxmlformats.org/drawingml/2006/main" wrap="square" lIns="38100" tIns="19050" rIns="38100" bIns="19050" anchor="ctr">
+            <a:noAutofit/>
+          </a:bodyPr>
           <a:lstStyle xmlns:a="http://schemas.openxmlformats.org/drawingml/2006/main"/>
           <a:p xmlns:a="http://schemas.openxmlformats.org/drawingml/2006/main">
             <a:pPr algn="r">
@@ -1294,7 +1298,7 @@
                   <a:srgbClr val="697386"/>
                 </a:solidFill>
               </a:rPr>
-              <a:t>75%</a:t>
+              <a:t>¥28.5亿</a:t>
             </a:r>
           </a:p>
         </p:txBody>
@@ -1304,7 +1308,7 @@
           <p:cNvPr id="7" name="mekko-grid-2">
             <a:extLst xmlns:a="http://schemas.openxmlformats.org/drawingml/2006/main">
               <a:ext uri="{FF2B5EF4-FFF2-40B4-BE49-F238E27FC236}">
-                <a16:creationId xmlns:a16="http://schemas.microsoft.com/office/drawing/2014/main" id="{D623D293-CEB2-4E3C-90A5-CE1C34825CF2}"/>
+                <a16:creationId xmlns:a16="http://schemas.microsoft.com/office/drawing/2014/main" id="{A1813E6E-C6EE-4DDA-995A-B44BC72B5916}"/>
               </a:ext>
             </a:extLst>
           </p:cNvPr>
@@ -1335,19 +1339,19 @@
           <p:cNvPr id="8" name="mekko-tick-2">
             <a:extLst xmlns:a="http://schemas.openxmlformats.org/drawingml/2006/main">
               <a:ext uri="{FF2B5EF4-FFF2-40B4-BE49-F238E27FC236}">
-                <a16:creationId xmlns:a16="http://schemas.microsoft.com/office/drawing/2014/main" id="{61FB7F73-3216-4249-B39D-8CE4657E7FC5}"/>
-              </a:ext>
-            </a:extLst>
-          </p:cNvPr>
-          <p:cNvSpPr>
-            <a:spLocks xmlns:a="http://schemas.openxmlformats.org/drawingml/2006/main" noGrp="1"/>
-          </p:cNvSpPr>
-          <p:nvPr/>
-        </p:nvSpPr>
-        <p:spPr>
-          <a:xfrm xmlns:a="http://schemas.openxmlformats.org/drawingml/2006/main">
-            <a:off x="628650" y="3343275"/>
-            <a:ext cx="419100" cy="228600"/>
+                <a16:creationId xmlns:a16="http://schemas.microsoft.com/office/drawing/2014/main" id="{E0E9CDB3-193D-4678-BEAF-94C615CFD7AA}"/>
+              </a:ext>
+            </a:extLst>
+          </p:cNvPr>
+          <p:cNvSpPr>
+            <a:spLocks xmlns:a="http://schemas.openxmlformats.org/drawingml/2006/main" noGrp="1"/>
+          </p:cNvSpPr>
+          <p:nvPr/>
+        </p:nvSpPr>
+        <p:spPr>
+          <a:xfrm xmlns:a="http://schemas.openxmlformats.org/drawingml/2006/main">
+            <a:off x="247650" y="3343275"/>
+            <a:ext cx="857250" cy="228600"/>
           </a:xfrm>
           <a:prstGeom xmlns:a="http://schemas.openxmlformats.org/drawingml/2006/main" prst="rect">
             <a:avLst/>
@@ -1359,7 +1363,9 @@
           </a:ln>
         </p:spPr>
         <p:txBody>
-          <a:bodyPr xmlns:a="http://schemas.openxmlformats.org/drawingml/2006/main" anchor="ctr"/>
+          <a:bodyPr xmlns:a="http://schemas.openxmlformats.org/drawingml/2006/main" wrap="square" lIns="38100" tIns="19050" rIns="38100" bIns="19050" anchor="ctr">
+            <a:noAutofit/>
+          </a:bodyPr>
           <a:lstStyle xmlns:a="http://schemas.openxmlformats.org/drawingml/2006/main"/>
           <a:p xmlns:a="http://schemas.openxmlformats.org/drawingml/2006/main">
             <a:pPr algn="r">
@@ -1375,7 +1381,7 @@
                   <a:srgbClr val="697386"/>
                 </a:solidFill>
               </a:rPr>
-              <a:t>50%</a:t>
+              <a:t>¥19亿</a:t>
             </a:r>
           </a:p>
         </p:txBody>
@@ -1385,7 +1391,7 @@
           <p:cNvPr id="9" name="mekko-grid-3">
             <a:extLst xmlns:a="http://schemas.openxmlformats.org/drawingml/2006/main">
               <a:ext uri="{FF2B5EF4-FFF2-40B4-BE49-F238E27FC236}">
-                <a16:creationId xmlns:a16="http://schemas.microsoft.com/office/drawing/2014/main" id="{E1A5295C-E0ED-4D7E-A950-936BDB03D60A}"/>
+                <a16:creationId xmlns:a16="http://schemas.microsoft.com/office/drawing/2014/main" id="{F63C7A88-E9E9-4262-8369-DE5554A4D9A3}"/>
               </a:ext>
             </a:extLst>
           </p:cNvPr>
@@ -1416,19 +1422,19 @@
           <p:cNvPr id="10" name="mekko-tick-3">
             <a:extLst xmlns:a="http://schemas.openxmlformats.org/drawingml/2006/main">
               <a:ext uri="{FF2B5EF4-FFF2-40B4-BE49-F238E27FC236}">
-                <a16:creationId xmlns:a16="http://schemas.microsoft.com/office/drawing/2014/main" id="{C988A9C8-9A05-4336-AFB4-AFB62F0EE056}"/>
-              </a:ext>
-            </a:extLst>
-          </p:cNvPr>
-          <p:cNvSpPr>
-            <a:spLocks xmlns:a="http://schemas.openxmlformats.org/drawingml/2006/main" noGrp="1"/>
-          </p:cNvSpPr>
-          <p:nvPr/>
-        </p:nvSpPr>
-        <p:spPr>
-          <a:xfrm xmlns:a="http://schemas.openxmlformats.org/drawingml/2006/main">
-            <a:off x="628650" y="4081463"/>
-            <a:ext cx="419100" cy="228600"/>
+                <a16:creationId xmlns:a16="http://schemas.microsoft.com/office/drawing/2014/main" id="{25646EC2-AF57-456B-876D-6FB670C976FE}"/>
+              </a:ext>
+            </a:extLst>
+          </p:cNvPr>
+          <p:cNvSpPr>
+            <a:spLocks xmlns:a="http://schemas.openxmlformats.org/drawingml/2006/main" noGrp="1"/>
+          </p:cNvSpPr>
+          <p:nvPr/>
+        </p:nvSpPr>
+        <p:spPr>
+          <a:xfrm xmlns:a="http://schemas.openxmlformats.org/drawingml/2006/main">
+            <a:off x="247650" y="4081463"/>
+            <a:ext cx="857250" cy="228600"/>
           </a:xfrm>
           <a:prstGeom xmlns:a="http://schemas.openxmlformats.org/drawingml/2006/main" prst="rect">
             <a:avLst/>
@@ -1440,7 +1446,9 @@
           </a:ln>
         </p:spPr>
         <p:txBody>
-          <a:bodyPr xmlns:a="http://schemas.openxmlformats.org/drawingml/2006/main" anchor="ctr"/>
+          <a:bodyPr xmlns:a="http://schemas.openxmlformats.org/drawingml/2006/main" wrap="square" lIns="38100" tIns="19050" rIns="38100" bIns="19050" anchor="ctr">
+            <a:noAutofit/>
+          </a:bodyPr>
           <a:lstStyle xmlns:a="http://schemas.openxmlformats.org/drawingml/2006/main"/>
           <a:p xmlns:a="http://schemas.openxmlformats.org/drawingml/2006/main">
             <a:pPr algn="r">
@@ -1456,7 +1464,7 @@
                   <a:srgbClr val="697386"/>
                 </a:solidFill>
               </a:rPr>
-              <a:t>25%</a:t>
+              <a:t>¥9.5亿</a:t>
             </a:r>
           </a:p>
         </p:txBody>
@@ -1466,7 +1474,7 @@
           <p:cNvPr id="11" name="mekko-grid-4">
             <a:extLst xmlns:a="http://schemas.openxmlformats.org/drawingml/2006/main">
               <a:ext uri="{FF2B5EF4-FFF2-40B4-BE49-F238E27FC236}">
-                <a16:creationId xmlns:a16="http://schemas.microsoft.com/office/drawing/2014/main" id="{0661BFA8-5A49-4285-8CD7-6BA403B8C897}"/>
+                <a16:creationId xmlns:a16="http://schemas.microsoft.com/office/drawing/2014/main" id="{0E94B6B3-FE1A-46C1-8383-B21E5665E9E5}"/>
               </a:ext>
             </a:extLst>
           </p:cNvPr>
@@ -1497,19 +1505,19 @@
           <p:cNvPr id="12" name="mekko-tick-4">
             <a:extLst xmlns:a="http://schemas.openxmlformats.org/drawingml/2006/main">
               <a:ext uri="{FF2B5EF4-FFF2-40B4-BE49-F238E27FC236}">
-                <a16:creationId xmlns:a16="http://schemas.microsoft.com/office/drawing/2014/main" id="{2F5379D6-2035-4640-8C74-2DBC313BAE0C}"/>
-              </a:ext>
-            </a:extLst>
-          </p:cNvPr>
-          <p:cNvSpPr>
-            <a:spLocks xmlns:a="http://schemas.openxmlformats.org/drawingml/2006/main" noGrp="1"/>
-          </p:cNvSpPr>
-          <p:nvPr/>
-        </p:nvSpPr>
-        <p:spPr>
-          <a:xfrm xmlns:a="http://schemas.openxmlformats.org/drawingml/2006/main">
-            <a:off x="628650" y="4819650"/>
-            <a:ext cx="419100" cy="228600"/>
+                <a16:creationId xmlns:a16="http://schemas.microsoft.com/office/drawing/2014/main" id="{59BFBB95-6CC5-43EE-AACB-10176AEFE977}"/>
+              </a:ext>
+            </a:extLst>
+          </p:cNvPr>
+          <p:cNvSpPr>
+            <a:spLocks xmlns:a="http://schemas.openxmlformats.org/drawingml/2006/main" noGrp="1"/>
+          </p:cNvSpPr>
+          <p:nvPr/>
+        </p:nvSpPr>
+        <p:spPr>
+          <a:xfrm xmlns:a="http://schemas.openxmlformats.org/drawingml/2006/main">
+            <a:off x="247650" y="4819650"/>
+            <a:ext cx="857250" cy="228600"/>
           </a:xfrm>
           <a:prstGeom xmlns:a="http://schemas.openxmlformats.org/drawingml/2006/main" prst="rect">
             <a:avLst/>
@@ -1521,7 +1529,9 @@
           </a:ln>
         </p:spPr>
         <p:txBody>
-          <a:bodyPr xmlns:a="http://schemas.openxmlformats.org/drawingml/2006/main" anchor="ctr"/>
+          <a:bodyPr xmlns:a="http://schemas.openxmlformats.org/drawingml/2006/main" wrap="square" lIns="38100" tIns="19050" rIns="38100" bIns="19050" anchor="ctr">
+            <a:noAutofit/>
+          </a:bodyPr>
           <a:lstStyle xmlns:a="http://schemas.openxmlformats.org/drawingml/2006/main"/>
           <a:p xmlns:a="http://schemas.openxmlformats.org/drawingml/2006/main">
             <a:pPr algn="r">
@@ -1537,7 +1547,7 @@
                   <a:srgbClr val="697386"/>
                 </a:solidFill>
               </a:rPr>
-              <a:t>0%</a:t>
+              <a:t>¥0亿</a:t>
             </a:r>
           </a:p>
         </p:txBody>
@@ -1547,19 +1557,19 @@
           <p:cNvPr id="13" name="mekko-1-1">
             <a:extLst xmlns:a="http://schemas.openxmlformats.org/drawingml/2006/main">
               <a:ext uri="{FF2B5EF4-FFF2-40B4-BE49-F238E27FC236}">
-                <a16:creationId xmlns:a16="http://schemas.microsoft.com/office/drawing/2014/main" id="{F12A804B-4A8D-487A-94F1-83CE2E8EB123}"/>
-              </a:ext>
-            </a:extLst>
-          </p:cNvPr>
-          <p:cNvSpPr>
-            <a:spLocks xmlns:a="http://schemas.openxmlformats.org/drawingml/2006/main" noGrp="1"/>
-          </p:cNvSpPr>
-          <p:nvPr/>
-        </p:nvSpPr>
-        <p:spPr>
-          <a:xfrm xmlns:a="http://schemas.openxmlformats.org/drawingml/2006/main">
-            <a:off x="1104900" y="4727258"/>
-            <a:ext cx="2353056" cy="206693"/>
+                <a16:creationId xmlns:a16="http://schemas.microsoft.com/office/drawing/2014/main" id="{558A28B8-D694-45E6-8259-D6CA89C3F71D}"/>
+              </a:ext>
+            </a:extLst>
+          </p:cNvPr>
+          <p:cNvSpPr>
+            <a:spLocks xmlns:a="http://schemas.openxmlformats.org/drawingml/2006/main" noGrp="1"/>
+          </p:cNvSpPr>
+          <p:nvPr/>
+        </p:nvSpPr>
+        <p:spPr>
+          <a:xfrm xmlns:a="http://schemas.openxmlformats.org/drawingml/2006/main">
+            <a:off x="1104900" y="4700838"/>
+            <a:ext cx="2328545" cy="233112"/>
           </a:xfrm>
           <a:prstGeom xmlns:a="http://schemas.openxmlformats.org/drawingml/2006/main" prst="rect">
             <a:avLst/>
@@ -1580,19 +1590,19 @@
           <p:cNvPr id="14" name="mekko-1-2">
             <a:extLst xmlns:a="http://schemas.openxmlformats.org/drawingml/2006/main">
               <a:ext uri="{FF2B5EF4-FFF2-40B4-BE49-F238E27FC236}">
-                <a16:creationId xmlns:a16="http://schemas.microsoft.com/office/drawing/2014/main" id="{AA96283C-FEBD-4632-BA65-6C088FDFB32C}"/>
-              </a:ext>
-            </a:extLst>
-          </p:cNvPr>
-          <p:cNvSpPr>
-            <a:spLocks xmlns:a="http://schemas.openxmlformats.org/drawingml/2006/main" noGrp="1"/>
-          </p:cNvSpPr>
-          <p:nvPr/>
-        </p:nvSpPr>
-        <p:spPr>
-          <a:xfrm xmlns:a="http://schemas.openxmlformats.org/drawingml/2006/main">
-            <a:off x="1104900" y="3605213"/>
-            <a:ext cx="2353056" cy="1122045"/>
+                <a16:creationId xmlns:a16="http://schemas.microsoft.com/office/drawing/2014/main" id="{8FF41192-BB93-4105-9327-E3173DA78F9D}"/>
+              </a:ext>
+            </a:extLst>
+          </p:cNvPr>
+          <p:cNvSpPr>
+            <a:spLocks xmlns:a="http://schemas.openxmlformats.org/drawingml/2006/main" noGrp="1"/>
+          </p:cNvSpPr>
+          <p:nvPr/>
+        </p:nvSpPr>
+        <p:spPr>
+          <a:xfrm xmlns:a="http://schemas.openxmlformats.org/drawingml/2006/main">
+            <a:off x="1104900" y="3612983"/>
+            <a:ext cx="2328545" cy="1087855"/>
           </a:xfrm>
           <a:prstGeom xmlns:a="http://schemas.openxmlformats.org/drawingml/2006/main" prst="rect">
             <a:avLst/>
@@ -1613,19 +1623,19 @@
           <p:cNvPr id="15" name="mekko-label-1-2">
             <a:extLst xmlns:a="http://schemas.openxmlformats.org/drawingml/2006/main">
               <a:ext uri="{FF2B5EF4-FFF2-40B4-BE49-F238E27FC236}">
-                <a16:creationId xmlns:a16="http://schemas.microsoft.com/office/drawing/2014/main" id="{FCE58052-6811-48EE-A75A-23A4806311FE}"/>
-              </a:ext>
-            </a:extLst>
-          </p:cNvPr>
-          <p:cNvSpPr>
-            <a:spLocks xmlns:a="http://schemas.openxmlformats.org/drawingml/2006/main" noGrp="1"/>
-          </p:cNvSpPr>
-          <p:nvPr/>
-        </p:nvSpPr>
-        <p:spPr>
-          <a:xfrm xmlns:a="http://schemas.openxmlformats.org/drawingml/2006/main">
-            <a:off x="1143000" y="4032885"/>
-            <a:ext cx="2276856" cy="266700"/>
+                <a16:creationId xmlns:a16="http://schemas.microsoft.com/office/drawing/2014/main" id="{AD8BBF23-3110-4B19-9A13-BF29A800BC7D}"/>
+              </a:ext>
+            </a:extLst>
+          </p:cNvPr>
+          <p:cNvSpPr>
+            <a:spLocks xmlns:a="http://schemas.openxmlformats.org/drawingml/2006/main" noGrp="1"/>
+          </p:cNvSpPr>
+          <p:nvPr/>
+        </p:nvSpPr>
+        <p:spPr>
+          <a:xfrm xmlns:a="http://schemas.openxmlformats.org/drawingml/2006/main">
+            <a:off x="1143000" y="4023561"/>
+            <a:ext cx="2252345" cy="266700"/>
           </a:xfrm>
           <a:prstGeom xmlns:a="http://schemas.openxmlformats.org/drawingml/2006/main" prst="rect">
             <a:avLst/>
@@ -1637,7 +1647,9 @@
           </a:ln>
         </p:spPr>
         <p:txBody>
-          <a:bodyPr xmlns:a="http://schemas.openxmlformats.org/drawingml/2006/main" anchor="ctr"/>
+          <a:bodyPr xmlns:a="http://schemas.openxmlformats.org/drawingml/2006/main" wrap="square" lIns="38100" tIns="19050" rIns="38100" bIns="19050" anchor="ctr">
+            <a:noAutofit/>
+          </a:bodyPr>
           <a:lstStyle xmlns:a="http://schemas.openxmlformats.org/drawingml/2006/main"/>
           <a:p xmlns:a="http://schemas.openxmlformats.org/drawingml/2006/main">
             <a:pPr algn="ctr">
@@ -1653,7 +1665,7 @@
                   <a:srgbClr val="FFFFFF"/>
                 </a:solidFill>
               </a:rPr>
-              <a:t>对手 A 38%</a:t>
+              <a:t>对手 A ¥14亿</a:t>
             </a:r>
           </a:p>
         </p:txBody>
@@ -1663,19 +1675,19 @@
           <p:cNvPr id="16" name="mekko-1-3">
             <a:extLst xmlns:a="http://schemas.openxmlformats.org/drawingml/2006/main">
               <a:ext uri="{FF2B5EF4-FFF2-40B4-BE49-F238E27FC236}">
-                <a16:creationId xmlns:a16="http://schemas.microsoft.com/office/drawing/2014/main" id="{485C2935-AA0D-4F41-A4DE-FFA3A0A1E128}"/>
-              </a:ext>
-            </a:extLst>
-          </p:cNvPr>
-          <p:cNvSpPr>
-            <a:spLocks xmlns:a="http://schemas.openxmlformats.org/drawingml/2006/main" noGrp="1"/>
-          </p:cNvSpPr>
-          <p:nvPr/>
-        </p:nvSpPr>
-        <p:spPr>
-          <a:xfrm xmlns:a="http://schemas.openxmlformats.org/drawingml/2006/main">
-            <a:off x="1104900" y="2867025"/>
-            <a:ext cx="2353056" cy="738188"/>
+                <a16:creationId xmlns:a16="http://schemas.microsoft.com/office/drawing/2014/main" id="{4B225860-6B3C-4C03-87DC-8A185EFF15B6}"/>
+              </a:ext>
+            </a:extLst>
+          </p:cNvPr>
+          <p:cNvSpPr>
+            <a:spLocks xmlns:a="http://schemas.openxmlformats.org/drawingml/2006/main" noGrp="1"/>
+          </p:cNvSpPr>
+          <p:nvPr/>
+        </p:nvSpPr>
+        <p:spPr>
+          <a:xfrm xmlns:a="http://schemas.openxmlformats.org/drawingml/2006/main">
+            <a:off x="1104900" y="2835943"/>
+            <a:ext cx="2328545" cy="777039"/>
           </a:xfrm>
           <a:prstGeom xmlns:a="http://schemas.openxmlformats.org/drawingml/2006/main" prst="rect">
             <a:avLst/>
@@ -1696,19 +1708,19 @@
           <p:cNvPr id="17" name="mekko-label-1-3">
             <a:extLst xmlns:a="http://schemas.openxmlformats.org/drawingml/2006/main">
               <a:ext uri="{FF2B5EF4-FFF2-40B4-BE49-F238E27FC236}">
-                <a16:creationId xmlns:a16="http://schemas.microsoft.com/office/drawing/2014/main" id="{E225ADF5-933F-4E83-A8AE-204A6983887A}"/>
-              </a:ext>
-            </a:extLst>
-          </p:cNvPr>
-          <p:cNvSpPr>
-            <a:spLocks xmlns:a="http://schemas.openxmlformats.org/drawingml/2006/main" noGrp="1"/>
-          </p:cNvSpPr>
-          <p:nvPr/>
-        </p:nvSpPr>
-        <p:spPr>
-          <a:xfrm xmlns:a="http://schemas.openxmlformats.org/drawingml/2006/main">
-            <a:off x="1143000" y="3102769"/>
-            <a:ext cx="2276856" cy="266700"/>
+                <a16:creationId xmlns:a16="http://schemas.microsoft.com/office/drawing/2014/main" id="{172CA254-C571-407A-8399-CF7C4E82C078}"/>
+              </a:ext>
+            </a:extLst>
+          </p:cNvPr>
+          <p:cNvSpPr>
+            <a:spLocks xmlns:a="http://schemas.openxmlformats.org/drawingml/2006/main" noGrp="1"/>
+          </p:cNvSpPr>
+          <p:nvPr/>
+        </p:nvSpPr>
+        <p:spPr>
+          <a:xfrm xmlns:a="http://schemas.openxmlformats.org/drawingml/2006/main">
+            <a:off x="1143000" y="3091113"/>
+            <a:ext cx="2252345" cy="266700"/>
           </a:xfrm>
           <a:prstGeom xmlns:a="http://schemas.openxmlformats.org/drawingml/2006/main" prst="rect">
             <a:avLst/>
@@ -1720,7 +1732,9 @@
           </a:ln>
         </p:spPr>
         <p:txBody>
-          <a:bodyPr xmlns:a="http://schemas.openxmlformats.org/drawingml/2006/main" anchor="ctr"/>
+          <a:bodyPr xmlns:a="http://schemas.openxmlformats.org/drawingml/2006/main" wrap="square" lIns="38100" tIns="19050" rIns="38100" bIns="19050" anchor="ctr">
+            <a:noAutofit/>
+          </a:bodyPr>
           <a:lstStyle xmlns:a="http://schemas.openxmlformats.org/drawingml/2006/main"/>
           <a:p xmlns:a="http://schemas.openxmlformats.org/drawingml/2006/main">
             <a:pPr algn="ctr">
@@ -1736,7 +1750,7 @@
                   <a:srgbClr val="FFFFFF"/>
                 </a:solidFill>
               </a:rPr>
-              <a:t>对手 B 25%</a:t>
+              <a:t>对手 B ¥10亿</a:t>
             </a:r>
           </a:p>
         </p:txBody>
@@ -1746,7 +1760,7 @@
           <p:cNvPr id="18" name="mekko-1-4">
             <a:extLst xmlns:a="http://schemas.openxmlformats.org/drawingml/2006/main">
               <a:ext uri="{FF2B5EF4-FFF2-40B4-BE49-F238E27FC236}">
-                <a16:creationId xmlns:a16="http://schemas.microsoft.com/office/drawing/2014/main" id="{EF264C01-85A6-4362-B3CB-F003B0E85B8D}"/>
+                <a16:creationId xmlns:a16="http://schemas.microsoft.com/office/drawing/2014/main" id="{AE79A7E9-C98F-44E0-A64F-B6E13D9D1098}"/>
               </a:ext>
             </a:extLst>
           </p:cNvPr>
@@ -1758,7 +1772,7 @@
         <p:spPr>
           <a:xfrm xmlns:a="http://schemas.openxmlformats.org/drawingml/2006/main">
             <a:off x="1104900" y="1981200"/>
-            <a:ext cx="2353056" cy="885825"/>
+            <a:ext cx="2328545" cy="854743"/>
           </a:xfrm>
           <a:prstGeom xmlns:a="http://schemas.openxmlformats.org/drawingml/2006/main" prst="rect">
             <a:avLst/>
@@ -1779,19 +1793,19 @@
           <p:cNvPr id="19" name="mekko-label-1-4">
             <a:extLst xmlns:a="http://schemas.openxmlformats.org/drawingml/2006/main">
               <a:ext uri="{FF2B5EF4-FFF2-40B4-BE49-F238E27FC236}">
-                <a16:creationId xmlns:a16="http://schemas.microsoft.com/office/drawing/2014/main" id="{DA4A2313-89CB-4F7D-862C-513540195DA8}"/>
-              </a:ext>
-            </a:extLst>
-          </p:cNvPr>
-          <p:cNvSpPr>
-            <a:spLocks xmlns:a="http://schemas.openxmlformats.org/drawingml/2006/main" noGrp="1"/>
-          </p:cNvSpPr>
-          <p:nvPr/>
-        </p:nvSpPr>
-        <p:spPr>
-          <a:xfrm xmlns:a="http://schemas.openxmlformats.org/drawingml/2006/main">
-            <a:off x="1143000" y="2290763"/>
-            <a:ext cx="2276856" cy="266700"/>
+                <a16:creationId xmlns:a16="http://schemas.microsoft.com/office/drawing/2014/main" id="{1F9A1B13-6EE6-4B0A-91E7-894CD134DB9E}"/>
+              </a:ext>
+            </a:extLst>
+          </p:cNvPr>
+          <p:cNvSpPr>
+            <a:spLocks xmlns:a="http://schemas.openxmlformats.org/drawingml/2006/main" noGrp="1"/>
+          </p:cNvSpPr>
+          <p:nvPr/>
+        </p:nvSpPr>
+        <p:spPr>
+          <a:xfrm xmlns:a="http://schemas.openxmlformats.org/drawingml/2006/main">
+            <a:off x="1143000" y="2275222"/>
+            <a:ext cx="2252345" cy="266700"/>
           </a:xfrm>
           <a:prstGeom xmlns:a="http://schemas.openxmlformats.org/drawingml/2006/main" prst="rect">
             <a:avLst/>
@@ -1803,7 +1817,9 @@
           </a:ln>
         </p:spPr>
         <p:txBody>
-          <a:bodyPr xmlns:a="http://schemas.openxmlformats.org/drawingml/2006/main" anchor="ctr"/>
+          <a:bodyPr xmlns:a="http://schemas.openxmlformats.org/drawingml/2006/main" wrap="square" lIns="38100" tIns="19050" rIns="38100" bIns="19050" anchor="ctr">
+            <a:noAutofit/>
+          </a:bodyPr>
           <a:lstStyle xmlns:a="http://schemas.openxmlformats.org/drawingml/2006/main"/>
           <a:p xmlns:a="http://schemas.openxmlformats.org/drawingml/2006/main">
             <a:pPr algn="ctr">
@@ -1819,7 +1835,7 @@
                   <a:srgbClr val="172033"/>
                 </a:solidFill>
               </a:rPr>
-              <a:t>其他 30%</a:t>
+              <a:t>其他 ¥11亿</a:t>
             </a:r>
           </a:p>
         </p:txBody>
@@ -1829,7 +1845,7 @@
           <p:cNvPr id="20" name="mekko-top-1">
             <a:extLst xmlns:a="http://schemas.openxmlformats.org/drawingml/2006/main">
               <a:ext uri="{FF2B5EF4-FFF2-40B4-BE49-F238E27FC236}">
-                <a16:creationId xmlns:a16="http://schemas.microsoft.com/office/drawing/2014/main" id="{E9E064A6-2512-4BD9-A766-E6FF96808CAF}"/>
+                <a16:creationId xmlns:a16="http://schemas.microsoft.com/office/drawing/2014/main" id="{56EDB4C8-87D7-4C92-9CFC-1C3288E200E1}"/>
               </a:ext>
             </a:extLst>
           </p:cNvPr>
@@ -1841,7 +1857,7 @@
         <p:spPr>
           <a:xfrm xmlns:a="http://schemas.openxmlformats.org/drawingml/2006/main">
             <a:off x="1104900" y="1447800"/>
-            <a:ext cx="2353056" cy="457200"/>
+            <a:ext cx="2328545" cy="457200"/>
           </a:xfrm>
           <a:prstGeom xmlns:a="http://schemas.openxmlformats.org/drawingml/2006/main" prst="rect">
             <a:avLst/>
@@ -1853,18 +1869,20 @@
           </a:ln>
         </p:spPr>
         <p:txBody>
-          <a:bodyPr xmlns:a="http://schemas.openxmlformats.org/drawingml/2006/main" anchor="ctr"/>
+          <a:bodyPr xmlns:a="http://schemas.openxmlformats.org/drawingml/2006/main" wrap="square" lIns="38100" tIns="19050" rIns="38100" bIns="19050" anchor="ctr">
+            <a:noAutofit/>
+          </a:bodyPr>
           <a:lstStyle xmlns:a="http://schemas.openxmlformats.org/drawingml/2006/main"/>
           <a:p xmlns:a="http://schemas.openxmlformats.org/drawingml/2006/main">
             <a:pPr algn="ctr">
-              <a:defRPr sz="1600" b="1">
+              <a:defRPr sz="1400" b="1">
                 <a:solidFill>
                   <a:srgbClr val="E8872D"/>
                 </a:solidFill>
               </a:defRPr>
             </a:pPr>
             <a:r>
-              <a:rPr sz="1600" b="1">
+              <a:rPr sz="1400" b="1">
                 <a:solidFill>
                   <a:srgbClr val="E8872D"/>
                 </a:solidFill>
@@ -1874,19 +1892,19 @@
           </a:p>
           <a:p xmlns:a="http://schemas.openxmlformats.org/drawingml/2006/main">
             <a:pPr algn="ctr">
-              <a:defRPr sz="1600" b="1">
+              <a:defRPr sz="1400" b="1">
                 <a:solidFill>
                   <a:srgbClr val="E8872D"/>
                 </a:solidFill>
               </a:defRPr>
             </a:pPr>
             <a:r>
-              <a:rPr sz="1600" b="1">
+              <a:rPr sz="1400" b="1">
                 <a:solidFill>
                   <a:srgbClr val="E8872D"/>
                 </a:solidFill>
               </a:rPr>
-              <a:t>CAGR +12%</a:t>
+              <a:t>+12%</a:t>
             </a:r>
           </a:p>
         </p:txBody>
@@ -1896,7 +1914,7 @@
           <p:cNvPr id="21" name="mekko-bottom-1">
             <a:extLst xmlns:a="http://schemas.openxmlformats.org/drawingml/2006/main">
               <a:ext uri="{FF2B5EF4-FFF2-40B4-BE49-F238E27FC236}">
-                <a16:creationId xmlns:a16="http://schemas.microsoft.com/office/drawing/2014/main" id="{13AAB004-D8A0-4FDA-A369-5C368D518788}"/>
+                <a16:creationId xmlns:a16="http://schemas.microsoft.com/office/drawing/2014/main" id="{6D551CAE-99E8-4097-AD79-F1885CDEE048}"/>
               </a:ext>
             </a:extLst>
           </p:cNvPr>
@@ -1908,7 +1926,7 @@
         <p:spPr>
           <a:xfrm xmlns:a="http://schemas.openxmlformats.org/drawingml/2006/main">
             <a:off x="1104900" y="5010150"/>
-            <a:ext cx="2353056" cy="381000"/>
+            <a:ext cx="2328545" cy="381000"/>
           </a:xfrm>
           <a:prstGeom xmlns:a="http://schemas.openxmlformats.org/drawingml/2006/main" prst="rect">
             <a:avLst/>
@@ -1920,7 +1938,9 @@
           </a:ln>
         </p:spPr>
         <p:txBody>
-          <a:bodyPr xmlns:a="http://schemas.openxmlformats.org/drawingml/2006/main" anchor="ctr"/>
+          <a:bodyPr xmlns:a="http://schemas.openxmlformats.org/drawingml/2006/main" wrap="square" lIns="38100" tIns="19050" rIns="38100" bIns="19050" anchor="ctr">
+            <a:noAutofit/>
+          </a:bodyPr>
           <a:lstStyle xmlns:a="http://schemas.openxmlformats.org/drawingml/2006/main"/>
           <a:p xmlns:a="http://schemas.openxmlformats.org/drawingml/2006/main">
             <a:pPr algn="ctr">
@@ -1953,7 +1973,7 @@
                   <a:srgbClr val="E8872D"/>
                 </a:solidFill>
               </a:rPr>
-              <a:t>32%</a:t>
+              <a:t>¥38亿</a:t>
             </a:r>
           </a:p>
         </p:txBody>
@@ -1963,7 +1983,7 @@
           <p:cNvPr id="22" name="mekko-priority-1">
             <a:extLst xmlns:a="http://schemas.openxmlformats.org/drawingml/2006/main">
               <a:ext uri="{FF2B5EF4-FFF2-40B4-BE49-F238E27FC236}">
-                <a16:creationId xmlns:a16="http://schemas.microsoft.com/office/drawing/2014/main" id="{4DFDA516-B37F-4B97-8A2D-820675D0BCF2}"/>
+                <a16:creationId xmlns:a16="http://schemas.microsoft.com/office/drawing/2014/main" id="{5CDC22EF-6396-454E-BCF4-B1200DAB6908}"/>
               </a:ext>
             </a:extLst>
           </p:cNvPr>
@@ -1975,7 +1995,7 @@
         <p:spPr>
           <a:xfrm xmlns:a="http://schemas.openxmlformats.org/drawingml/2006/main">
             <a:off x="1076325" y="1952625"/>
-            <a:ext cx="2410206" cy="3009900"/>
+            <a:ext cx="2385695" cy="3009900"/>
           </a:xfrm>
           <a:prstGeom xmlns:a="http://schemas.openxmlformats.org/drawingml/2006/main" prst="rect">
             <a:avLst/>
@@ -1994,19 +2014,19 @@
           <p:cNvPr id="23" name="mekko-2-1">
             <a:extLst xmlns:a="http://schemas.openxmlformats.org/drawingml/2006/main">
               <a:ext uri="{FF2B5EF4-FFF2-40B4-BE49-F238E27FC236}">
-                <a16:creationId xmlns:a16="http://schemas.microsoft.com/office/drawing/2014/main" id="{DAD66856-2A21-439A-A901-FEC736339B80}"/>
-              </a:ext>
-            </a:extLst>
-          </p:cNvPr>
-          <p:cNvSpPr>
-            <a:spLocks xmlns:a="http://schemas.openxmlformats.org/drawingml/2006/main" noGrp="1"/>
-          </p:cNvSpPr>
-          <p:nvPr/>
-        </p:nvSpPr>
-        <p:spPr>
-          <a:xfrm xmlns:a="http://schemas.openxmlformats.org/drawingml/2006/main">
-            <a:off x="3457956" y="4697730"/>
-            <a:ext cx="1764792" cy="236220"/>
+                <a16:creationId xmlns:a16="http://schemas.microsoft.com/office/drawing/2014/main" id="{78E14DA7-9DED-48EE-99D1-D037F0570E14}"/>
+              </a:ext>
+            </a:extLst>
+          </p:cNvPr>
+          <p:cNvSpPr>
+            <a:spLocks xmlns:a="http://schemas.openxmlformats.org/drawingml/2006/main" noGrp="1"/>
+          </p:cNvSpPr>
+          <p:nvPr/>
+        </p:nvSpPr>
+        <p:spPr>
+          <a:xfrm xmlns:a="http://schemas.openxmlformats.org/drawingml/2006/main">
+            <a:off x="3433445" y="4778542"/>
+            <a:ext cx="1777048" cy="155408"/>
           </a:xfrm>
           <a:prstGeom xmlns:a="http://schemas.openxmlformats.org/drawingml/2006/main" prst="rect">
             <a:avLst/>
@@ -2027,19 +2047,19 @@
           <p:cNvPr id="24" name="mekko-2-2">
             <a:extLst xmlns:a="http://schemas.openxmlformats.org/drawingml/2006/main">
               <a:ext uri="{FF2B5EF4-FFF2-40B4-BE49-F238E27FC236}">
-                <a16:creationId xmlns:a16="http://schemas.microsoft.com/office/drawing/2014/main" id="{35DCB0DA-5256-451B-B8E0-0D60F08F3B48}"/>
-              </a:ext>
-            </a:extLst>
-          </p:cNvPr>
-          <p:cNvSpPr>
-            <a:spLocks xmlns:a="http://schemas.openxmlformats.org/drawingml/2006/main" noGrp="1"/>
-          </p:cNvSpPr>
-          <p:nvPr/>
-        </p:nvSpPr>
-        <p:spPr>
-          <a:xfrm xmlns:a="http://schemas.openxmlformats.org/drawingml/2006/main">
-            <a:off x="3457956" y="3693795"/>
-            <a:ext cx="1764792" cy="1003935"/>
+                <a16:creationId xmlns:a16="http://schemas.microsoft.com/office/drawing/2014/main" id="{B0D3CCE4-5F1F-4C3A-AFF9-01057A73BB29}"/>
+              </a:ext>
+            </a:extLst>
+          </p:cNvPr>
+          <p:cNvSpPr>
+            <a:spLocks xmlns:a="http://schemas.openxmlformats.org/drawingml/2006/main" noGrp="1"/>
+          </p:cNvSpPr>
+          <p:nvPr/>
+        </p:nvSpPr>
+        <p:spPr>
+          <a:xfrm xmlns:a="http://schemas.openxmlformats.org/drawingml/2006/main">
+            <a:off x="3433445" y="4001503"/>
+            <a:ext cx="1777048" cy="777039"/>
           </a:xfrm>
           <a:prstGeom xmlns:a="http://schemas.openxmlformats.org/drawingml/2006/main" prst="rect">
             <a:avLst/>
@@ -2060,19 +2080,19 @@
           <p:cNvPr id="25" name="mekko-label-2-2">
             <a:extLst xmlns:a="http://schemas.openxmlformats.org/drawingml/2006/main">
               <a:ext uri="{FF2B5EF4-FFF2-40B4-BE49-F238E27FC236}">
-                <a16:creationId xmlns:a16="http://schemas.microsoft.com/office/drawing/2014/main" id="{DEA16EC9-4F4D-457D-9CD9-584C2B1F9E5C}"/>
-              </a:ext>
-            </a:extLst>
-          </p:cNvPr>
-          <p:cNvSpPr>
-            <a:spLocks xmlns:a="http://schemas.openxmlformats.org/drawingml/2006/main" noGrp="1"/>
-          </p:cNvSpPr>
-          <p:nvPr/>
-        </p:nvSpPr>
-        <p:spPr>
-          <a:xfrm xmlns:a="http://schemas.openxmlformats.org/drawingml/2006/main">
-            <a:off x="3496056" y="4062412"/>
-            <a:ext cx="1688592" cy="266700"/>
+                <a16:creationId xmlns:a16="http://schemas.microsoft.com/office/drawing/2014/main" id="{65F62433-4ED8-42E9-A777-5C1C5A835060}"/>
+              </a:ext>
+            </a:extLst>
+          </p:cNvPr>
+          <p:cNvSpPr>
+            <a:spLocks xmlns:a="http://schemas.openxmlformats.org/drawingml/2006/main" noGrp="1"/>
+          </p:cNvSpPr>
+          <p:nvPr/>
+        </p:nvSpPr>
+        <p:spPr>
+          <a:xfrm xmlns:a="http://schemas.openxmlformats.org/drawingml/2006/main">
+            <a:off x="3471545" y="4256672"/>
+            <a:ext cx="1700848" cy="266700"/>
           </a:xfrm>
           <a:prstGeom xmlns:a="http://schemas.openxmlformats.org/drawingml/2006/main" prst="rect">
             <a:avLst/>
@@ -2084,7 +2104,9 @@
           </a:ln>
         </p:spPr>
         <p:txBody>
-          <a:bodyPr xmlns:a="http://schemas.openxmlformats.org/drawingml/2006/main" anchor="ctr"/>
+          <a:bodyPr xmlns:a="http://schemas.openxmlformats.org/drawingml/2006/main" wrap="square" lIns="38100" tIns="19050" rIns="38100" bIns="19050" anchor="ctr">
+            <a:noAutofit/>
+          </a:bodyPr>
           <a:lstStyle xmlns:a="http://schemas.openxmlformats.org/drawingml/2006/main"/>
           <a:p xmlns:a="http://schemas.openxmlformats.org/drawingml/2006/main">
             <a:pPr algn="ctr">
@@ -2100,7 +2122,7 @@
                   <a:srgbClr val="FFFFFF"/>
                 </a:solidFill>
               </a:rPr>
-              <a:t>对手 A 34%</a:t>
+              <a:t>对手 A ¥10亿</a:t>
             </a:r>
           </a:p>
         </p:txBody>
@@ -2110,19 +2132,19 @@
           <p:cNvPr id="26" name="mekko-2-3">
             <a:extLst xmlns:a="http://schemas.openxmlformats.org/drawingml/2006/main">
               <a:ext uri="{FF2B5EF4-FFF2-40B4-BE49-F238E27FC236}">
-                <a16:creationId xmlns:a16="http://schemas.microsoft.com/office/drawing/2014/main" id="{13540DC0-CF8B-4E41-B2AA-59BB613A403F}"/>
-              </a:ext>
-            </a:extLst>
-          </p:cNvPr>
-          <p:cNvSpPr>
-            <a:spLocks xmlns:a="http://schemas.openxmlformats.org/drawingml/2006/main" noGrp="1"/>
-          </p:cNvSpPr>
-          <p:nvPr/>
-        </p:nvSpPr>
-        <p:spPr>
-          <a:xfrm xmlns:a="http://schemas.openxmlformats.org/drawingml/2006/main">
-            <a:off x="3457956" y="2867025"/>
-            <a:ext cx="1764792" cy="826770"/>
+                <a16:creationId xmlns:a16="http://schemas.microsoft.com/office/drawing/2014/main" id="{1DE22FFE-4E9E-4592-8D08-BB923F6895F3}"/>
+              </a:ext>
+            </a:extLst>
+          </p:cNvPr>
+          <p:cNvSpPr>
+            <a:spLocks xmlns:a="http://schemas.openxmlformats.org/drawingml/2006/main" noGrp="1"/>
+          </p:cNvSpPr>
+          <p:nvPr/>
+        </p:nvSpPr>
+        <p:spPr>
+          <a:xfrm xmlns:a="http://schemas.openxmlformats.org/drawingml/2006/main">
+            <a:off x="3433445" y="3379871"/>
+            <a:ext cx="1777048" cy="621632"/>
           </a:xfrm>
           <a:prstGeom xmlns:a="http://schemas.openxmlformats.org/drawingml/2006/main" prst="rect">
             <a:avLst/>
@@ -2143,19 +2165,19 @@
           <p:cNvPr id="27" name="mekko-label-2-3">
             <a:extLst xmlns:a="http://schemas.openxmlformats.org/drawingml/2006/main">
               <a:ext uri="{FF2B5EF4-FFF2-40B4-BE49-F238E27FC236}">
-                <a16:creationId xmlns:a16="http://schemas.microsoft.com/office/drawing/2014/main" id="{E08225D3-6F68-4679-9CC5-7FD961754F4F}"/>
-              </a:ext>
-            </a:extLst>
-          </p:cNvPr>
-          <p:cNvSpPr>
-            <a:spLocks xmlns:a="http://schemas.openxmlformats.org/drawingml/2006/main" noGrp="1"/>
-          </p:cNvSpPr>
-          <p:nvPr/>
-        </p:nvSpPr>
-        <p:spPr>
-          <a:xfrm xmlns:a="http://schemas.openxmlformats.org/drawingml/2006/main">
-            <a:off x="3496056" y="3147060"/>
-            <a:ext cx="1688592" cy="266700"/>
+                <a16:creationId xmlns:a16="http://schemas.microsoft.com/office/drawing/2014/main" id="{535E0307-0269-4E69-A6D2-3A2E5AD386EA}"/>
+              </a:ext>
+            </a:extLst>
+          </p:cNvPr>
+          <p:cNvSpPr>
+            <a:spLocks xmlns:a="http://schemas.openxmlformats.org/drawingml/2006/main" noGrp="1"/>
+          </p:cNvSpPr>
+          <p:nvPr/>
+        </p:nvSpPr>
+        <p:spPr>
+          <a:xfrm xmlns:a="http://schemas.openxmlformats.org/drawingml/2006/main">
+            <a:off x="3471545" y="3557337"/>
+            <a:ext cx="1700848" cy="266700"/>
           </a:xfrm>
           <a:prstGeom xmlns:a="http://schemas.openxmlformats.org/drawingml/2006/main" prst="rect">
             <a:avLst/>
@@ -2167,7 +2189,9 @@
           </a:ln>
         </p:spPr>
         <p:txBody>
-          <a:bodyPr xmlns:a="http://schemas.openxmlformats.org/drawingml/2006/main" anchor="ctr"/>
+          <a:bodyPr xmlns:a="http://schemas.openxmlformats.org/drawingml/2006/main" wrap="square" lIns="38100" tIns="19050" rIns="38100" bIns="19050" anchor="ctr">
+            <a:noAutofit/>
+          </a:bodyPr>
           <a:lstStyle xmlns:a="http://schemas.openxmlformats.org/drawingml/2006/main"/>
           <a:p xmlns:a="http://schemas.openxmlformats.org/drawingml/2006/main">
             <a:pPr algn="ctr">
@@ -2183,7 +2207,7 @@
                   <a:srgbClr val="FFFFFF"/>
                 </a:solidFill>
               </a:rPr>
-              <a:t>对手 B 28%</a:t>
+              <a:t>对手 B ¥8亿</a:t>
             </a:r>
           </a:p>
         </p:txBody>
@@ -2193,19 +2217,19 @@
           <p:cNvPr id="28" name="mekko-2-4">
             <a:extLst xmlns:a="http://schemas.openxmlformats.org/drawingml/2006/main">
               <a:ext uri="{FF2B5EF4-FFF2-40B4-BE49-F238E27FC236}">
-                <a16:creationId xmlns:a16="http://schemas.microsoft.com/office/drawing/2014/main" id="{D4B2FF2F-9160-42CD-988A-3656B7A938DB}"/>
-              </a:ext>
-            </a:extLst>
-          </p:cNvPr>
-          <p:cNvSpPr>
-            <a:spLocks xmlns:a="http://schemas.openxmlformats.org/drawingml/2006/main" noGrp="1"/>
-          </p:cNvSpPr>
-          <p:nvPr/>
-        </p:nvSpPr>
-        <p:spPr>
-          <a:xfrm xmlns:a="http://schemas.openxmlformats.org/drawingml/2006/main">
-            <a:off x="3457956" y="1981200"/>
-            <a:ext cx="1764792" cy="885825"/>
+                <a16:creationId xmlns:a16="http://schemas.microsoft.com/office/drawing/2014/main" id="{6E989107-D3B5-48CE-BC08-8EF246076D81}"/>
+              </a:ext>
+            </a:extLst>
+          </p:cNvPr>
+          <p:cNvSpPr>
+            <a:spLocks xmlns:a="http://schemas.openxmlformats.org/drawingml/2006/main" noGrp="1"/>
+          </p:cNvSpPr>
+          <p:nvPr/>
+        </p:nvSpPr>
+        <p:spPr>
+          <a:xfrm xmlns:a="http://schemas.openxmlformats.org/drawingml/2006/main">
+            <a:off x="3433445" y="2680536"/>
+            <a:ext cx="1777048" cy="699336"/>
           </a:xfrm>
           <a:prstGeom xmlns:a="http://schemas.openxmlformats.org/drawingml/2006/main" prst="rect">
             <a:avLst/>
@@ -2226,19 +2250,19 @@
           <p:cNvPr id="29" name="mekko-label-2-4">
             <a:extLst xmlns:a="http://schemas.openxmlformats.org/drawingml/2006/main">
               <a:ext uri="{FF2B5EF4-FFF2-40B4-BE49-F238E27FC236}">
-                <a16:creationId xmlns:a16="http://schemas.microsoft.com/office/drawing/2014/main" id="{60E2BE8B-B8C6-433F-B32E-48D3FC01B5D3}"/>
-              </a:ext>
-            </a:extLst>
-          </p:cNvPr>
-          <p:cNvSpPr>
-            <a:spLocks xmlns:a="http://schemas.openxmlformats.org/drawingml/2006/main" noGrp="1"/>
-          </p:cNvSpPr>
-          <p:nvPr/>
-        </p:nvSpPr>
-        <p:spPr>
-          <a:xfrm xmlns:a="http://schemas.openxmlformats.org/drawingml/2006/main">
-            <a:off x="3496056" y="2290762"/>
-            <a:ext cx="1688592" cy="266700"/>
+                <a16:creationId xmlns:a16="http://schemas.microsoft.com/office/drawing/2014/main" id="{76EE29E2-F8F5-41F7-929F-3B7F71067252}"/>
+              </a:ext>
+            </a:extLst>
+          </p:cNvPr>
+          <p:cNvSpPr>
+            <a:spLocks xmlns:a="http://schemas.openxmlformats.org/drawingml/2006/main" noGrp="1"/>
+          </p:cNvSpPr>
+          <p:nvPr/>
+        </p:nvSpPr>
+        <p:spPr>
+          <a:xfrm xmlns:a="http://schemas.openxmlformats.org/drawingml/2006/main">
+            <a:off x="3471545" y="2896853"/>
+            <a:ext cx="1700848" cy="266700"/>
           </a:xfrm>
           <a:prstGeom xmlns:a="http://schemas.openxmlformats.org/drawingml/2006/main" prst="rect">
             <a:avLst/>
@@ -2250,7 +2274,9 @@
           </a:ln>
         </p:spPr>
         <p:txBody>
-          <a:bodyPr xmlns:a="http://schemas.openxmlformats.org/drawingml/2006/main" anchor="ctr"/>
+          <a:bodyPr xmlns:a="http://schemas.openxmlformats.org/drawingml/2006/main" wrap="square" lIns="38100" tIns="19050" rIns="38100" bIns="19050" anchor="ctr">
+            <a:noAutofit/>
+          </a:bodyPr>
           <a:lstStyle xmlns:a="http://schemas.openxmlformats.org/drawingml/2006/main"/>
           <a:p xmlns:a="http://schemas.openxmlformats.org/drawingml/2006/main">
             <a:pPr algn="ctr">
@@ -2266,7 +2292,7 @@
                   <a:srgbClr val="172033"/>
                 </a:solidFill>
               </a:rPr>
-              <a:t>其他 30%</a:t>
+              <a:t>其他 ¥9亿</a:t>
             </a:r>
           </a:p>
         </p:txBody>
@@ -2276,19 +2302,19 @@
           <p:cNvPr id="30" name="mekko-top-2">
             <a:extLst xmlns:a="http://schemas.openxmlformats.org/drawingml/2006/main">
               <a:ext uri="{FF2B5EF4-FFF2-40B4-BE49-F238E27FC236}">
-                <a16:creationId xmlns:a16="http://schemas.microsoft.com/office/drawing/2014/main" id="{B66E8A9A-45D4-421A-8C35-576B1C228C2E}"/>
-              </a:ext>
-            </a:extLst>
-          </p:cNvPr>
-          <p:cNvSpPr>
-            <a:spLocks xmlns:a="http://schemas.openxmlformats.org/drawingml/2006/main" noGrp="1"/>
-          </p:cNvSpPr>
-          <p:nvPr/>
-        </p:nvSpPr>
-        <p:spPr>
-          <a:xfrm xmlns:a="http://schemas.openxmlformats.org/drawingml/2006/main">
-            <a:off x="3457956" y="1447800"/>
-            <a:ext cx="1764792" cy="457200"/>
+                <a16:creationId xmlns:a16="http://schemas.microsoft.com/office/drawing/2014/main" id="{A84001CF-C305-4F31-8BAA-718F38FEABC2}"/>
+              </a:ext>
+            </a:extLst>
+          </p:cNvPr>
+          <p:cNvSpPr>
+            <a:spLocks xmlns:a="http://schemas.openxmlformats.org/drawingml/2006/main" noGrp="1"/>
+          </p:cNvSpPr>
+          <p:nvPr/>
+        </p:nvSpPr>
+        <p:spPr>
+          <a:xfrm xmlns:a="http://schemas.openxmlformats.org/drawingml/2006/main">
+            <a:off x="3433445" y="1447800"/>
+            <a:ext cx="1777048" cy="457200"/>
           </a:xfrm>
           <a:prstGeom xmlns:a="http://schemas.openxmlformats.org/drawingml/2006/main" prst="rect">
             <a:avLst/>
@@ -2300,18 +2326,20 @@
           </a:ln>
         </p:spPr>
         <p:txBody>
-          <a:bodyPr xmlns:a="http://schemas.openxmlformats.org/drawingml/2006/main" anchor="ctr"/>
+          <a:bodyPr xmlns:a="http://schemas.openxmlformats.org/drawingml/2006/main" wrap="square" lIns="38100" tIns="19050" rIns="38100" bIns="19050" anchor="ctr">
+            <a:noAutofit/>
+          </a:bodyPr>
           <a:lstStyle xmlns:a="http://schemas.openxmlformats.org/drawingml/2006/main"/>
           <a:p xmlns:a="http://schemas.openxmlformats.org/drawingml/2006/main">
             <a:pPr algn="ctr">
-              <a:defRPr sz="1600" b="1">
+              <a:defRPr sz="1400" b="1">
                 <a:solidFill>
                   <a:srgbClr val="E8872D"/>
                 </a:solidFill>
               </a:defRPr>
             </a:pPr>
             <a:r>
-              <a:rPr sz="1600" b="1">
+              <a:rPr sz="1400" b="1">
                 <a:solidFill>
                   <a:srgbClr val="E8872D"/>
                 </a:solidFill>
@@ -2321,19 +2349,19 @@
           </a:p>
           <a:p xmlns:a="http://schemas.openxmlformats.org/drawingml/2006/main">
             <a:pPr algn="ctr">
-              <a:defRPr sz="1600" b="1">
+              <a:defRPr sz="1400" b="1">
                 <a:solidFill>
                   <a:srgbClr val="E8872D"/>
                 </a:solidFill>
               </a:defRPr>
             </a:pPr>
             <a:r>
-              <a:rPr sz="1600" b="1">
+              <a:rPr sz="1400" b="1">
                 <a:solidFill>
                   <a:srgbClr val="E8872D"/>
                 </a:solidFill>
               </a:rPr>
-              <a:t>CAGR +9%</a:t>
+              <a:t>+9%</a:t>
             </a:r>
           </a:p>
         </p:txBody>
@@ -2343,19 +2371,19 @@
           <p:cNvPr id="31" name="mekko-bottom-2">
             <a:extLst xmlns:a="http://schemas.openxmlformats.org/drawingml/2006/main">
               <a:ext uri="{FF2B5EF4-FFF2-40B4-BE49-F238E27FC236}">
-                <a16:creationId xmlns:a16="http://schemas.microsoft.com/office/drawing/2014/main" id="{4B80C0A1-A2CF-4B1A-BBE3-68B273550C2C}"/>
-              </a:ext>
-            </a:extLst>
-          </p:cNvPr>
-          <p:cNvSpPr>
-            <a:spLocks xmlns:a="http://schemas.openxmlformats.org/drawingml/2006/main" noGrp="1"/>
-          </p:cNvSpPr>
-          <p:nvPr/>
-        </p:nvSpPr>
-        <p:spPr>
-          <a:xfrm xmlns:a="http://schemas.openxmlformats.org/drawingml/2006/main">
-            <a:off x="3457956" y="5010150"/>
-            <a:ext cx="1764792" cy="381000"/>
+                <a16:creationId xmlns:a16="http://schemas.microsoft.com/office/drawing/2014/main" id="{2176A943-3DE2-462D-A1DB-6C2C02B8A6DA}"/>
+              </a:ext>
+            </a:extLst>
+          </p:cNvPr>
+          <p:cNvSpPr>
+            <a:spLocks xmlns:a="http://schemas.openxmlformats.org/drawingml/2006/main" noGrp="1"/>
+          </p:cNvSpPr>
+          <p:nvPr/>
+        </p:nvSpPr>
+        <p:spPr>
+          <a:xfrm xmlns:a="http://schemas.openxmlformats.org/drawingml/2006/main">
+            <a:off x="3433445" y="5010150"/>
+            <a:ext cx="1777048" cy="381000"/>
           </a:xfrm>
           <a:prstGeom xmlns:a="http://schemas.openxmlformats.org/drawingml/2006/main" prst="rect">
             <a:avLst/>
@@ -2367,7 +2395,9 @@
           </a:ln>
         </p:spPr>
         <p:txBody>
-          <a:bodyPr xmlns:a="http://schemas.openxmlformats.org/drawingml/2006/main" anchor="ctr"/>
+          <a:bodyPr xmlns:a="http://schemas.openxmlformats.org/drawingml/2006/main" wrap="square" lIns="38100" tIns="19050" rIns="38100" bIns="19050" anchor="ctr">
+            <a:noAutofit/>
+          </a:bodyPr>
           <a:lstStyle xmlns:a="http://schemas.openxmlformats.org/drawingml/2006/main"/>
           <a:p xmlns:a="http://schemas.openxmlformats.org/drawingml/2006/main">
             <a:pPr algn="ctr">
@@ -2400,7 +2430,7 @@
                   <a:srgbClr val="E8872D"/>
                 </a:solidFill>
               </a:rPr>
-              <a:t>24%</a:t>
+              <a:t>¥29亿</a:t>
             </a:r>
           </a:p>
         </p:txBody>
@@ -2410,19 +2440,19 @@
           <p:cNvPr id="32" name="mekko-priority-2">
             <a:extLst xmlns:a="http://schemas.openxmlformats.org/drawingml/2006/main">
               <a:ext uri="{FF2B5EF4-FFF2-40B4-BE49-F238E27FC236}">
-                <a16:creationId xmlns:a16="http://schemas.microsoft.com/office/drawing/2014/main" id="{9A04FC52-F844-4E00-986D-1434D32D4C51}"/>
-              </a:ext>
-            </a:extLst>
-          </p:cNvPr>
-          <p:cNvSpPr>
-            <a:spLocks xmlns:a="http://schemas.openxmlformats.org/drawingml/2006/main" noGrp="1"/>
-          </p:cNvSpPr>
-          <p:nvPr/>
-        </p:nvSpPr>
-        <p:spPr>
-          <a:xfrm xmlns:a="http://schemas.openxmlformats.org/drawingml/2006/main">
-            <a:off x="3429381" y="1952625"/>
-            <a:ext cx="1821942" cy="3009900"/>
+                <a16:creationId xmlns:a16="http://schemas.microsoft.com/office/drawing/2014/main" id="{79084898-E81F-43BE-9647-A8EDFE952DFB}"/>
+              </a:ext>
+            </a:extLst>
+          </p:cNvPr>
+          <p:cNvSpPr>
+            <a:spLocks xmlns:a="http://schemas.openxmlformats.org/drawingml/2006/main" noGrp="1"/>
+          </p:cNvSpPr>
+          <p:nvPr/>
+        </p:nvSpPr>
+        <p:spPr>
+          <a:xfrm xmlns:a="http://schemas.openxmlformats.org/drawingml/2006/main">
+            <a:off x="3404870" y="1952625"/>
+            <a:ext cx="1834198" cy="3009900"/>
           </a:xfrm>
           <a:prstGeom xmlns:a="http://schemas.openxmlformats.org/drawingml/2006/main" prst="rect">
             <a:avLst/>
@@ -2441,19 +2471,19 @@
           <p:cNvPr id="33" name="mekko-3-1">
             <a:extLst xmlns:a="http://schemas.openxmlformats.org/drawingml/2006/main">
               <a:ext uri="{FF2B5EF4-FFF2-40B4-BE49-F238E27FC236}">
-                <a16:creationId xmlns:a16="http://schemas.microsoft.com/office/drawing/2014/main" id="{DE01F420-E074-4D6D-A9B9-742E2D98D5B1}"/>
-              </a:ext>
-            </a:extLst>
-          </p:cNvPr>
-          <p:cNvSpPr>
-            <a:spLocks xmlns:a="http://schemas.openxmlformats.org/drawingml/2006/main" noGrp="1"/>
-          </p:cNvSpPr>
-          <p:nvPr/>
-        </p:nvSpPr>
-        <p:spPr>
-          <a:xfrm xmlns:a="http://schemas.openxmlformats.org/drawingml/2006/main">
-            <a:off x="5222748" y="4520565"/>
-            <a:ext cx="1323594" cy="413385"/>
+                <a16:creationId xmlns:a16="http://schemas.microsoft.com/office/drawing/2014/main" id="{ADFAB8FD-9FF8-4B93-A6A7-9C3CF6C2686E}"/>
+              </a:ext>
+            </a:extLst>
+          </p:cNvPr>
+          <p:cNvSpPr>
+            <a:spLocks xmlns:a="http://schemas.openxmlformats.org/drawingml/2006/main" noGrp="1"/>
+          </p:cNvSpPr>
+          <p:nvPr/>
+        </p:nvSpPr>
+        <p:spPr>
+          <a:xfrm xmlns:a="http://schemas.openxmlformats.org/drawingml/2006/main">
+            <a:off x="5210493" y="4700838"/>
+            <a:ext cx="1348105" cy="233112"/>
           </a:xfrm>
           <a:prstGeom xmlns:a="http://schemas.openxmlformats.org/drawingml/2006/main" prst="rect">
             <a:avLst/>
@@ -2471,72 +2501,22 @@
       </p:sp>
       <p:sp>
         <p:nvSpPr>
-          <p:cNvPr id="34" name="mekko-label-3-1">
-            <a:extLst xmlns:a="http://schemas.openxmlformats.org/drawingml/2006/main">
-              <a:ext uri="{FF2B5EF4-FFF2-40B4-BE49-F238E27FC236}">
-                <a16:creationId xmlns:a16="http://schemas.microsoft.com/office/drawing/2014/main" id="{CDBBED48-85F3-4B61-9A3E-B2C91187CDBD}"/>
-              </a:ext>
-            </a:extLst>
-          </p:cNvPr>
-          <p:cNvSpPr>
-            <a:spLocks xmlns:a="http://schemas.openxmlformats.org/drawingml/2006/main" noGrp="1"/>
-          </p:cNvSpPr>
-          <p:nvPr/>
-        </p:nvSpPr>
-        <p:spPr>
-          <a:xfrm xmlns:a="http://schemas.openxmlformats.org/drawingml/2006/main">
-            <a:off x="5260848" y="4593908"/>
-            <a:ext cx="1247394" cy="266700"/>
-          </a:xfrm>
-          <a:prstGeom xmlns:a="http://schemas.openxmlformats.org/drawingml/2006/main" prst="rect">
-            <a:avLst/>
-          </a:prstGeom>
-          <a:noFill xmlns:a="http://schemas.openxmlformats.org/drawingml/2006/main"/>
-          <a:ln xmlns:a="http://schemas.openxmlformats.org/drawingml/2006/main" w="0">
-            <a:noFill/>
-            <a:prstDash val="solid"/>
-          </a:ln>
-        </p:spPr>
-        <p:txBody>
-          <a:bodyPr xmlns:a="http://schemas.openxmlformats.org/drawingml/2006/main" anchor="ctr"/>
-          <a:lstStyle xmlns:a="http://schemas.openxmlformats.org/drawingml/2006/main"/>
-          <a:p xmlns:a="http://schemas.openxmlformats.org/drawingml/2006/main">
-            <a:pPr algn="ctr">
-              <a:defRPr sz="1600" b="1">
-                <a:solidFill>
-                  <a:srgbClr val="FFFFFF"/>
-                </a:solidFill>
-              </a:defRPr>
-            </a:pPr>
-            <a:r>
-              <a:rPr sz="1600" b="1">
-                <a:solidFill>
-                  <a:srgbClr val="FFFFFF"/>
-                </a:solidFill>
-              </a:rPr>
-              <a:t>我方 14%</a:t>
-            </a:r>
-          </a:p>
-        </p:txBody>
-      </p:sp>
-      <p:sp>
-        <p:nvSpPr>
-          <p:cNvPr id="35" name="mekko-3-2">
-            <a:extLst xmlns:a="http://schemas.openxmlformats.org/drawingml/2006/main">
-              <a:ext uri="{FF2B5EF4-FFF2-40B4-BE49-F238E27FC236}">
-                <a16:creationId xmlns:a16="http://schemas.microsoft.com/office/drawing/2014/main" id="{236235D6-F56C-42AC-BA29-6915E65AA44B}"/>
-              </a:ext>
-            </a:extLst>
-          </p:cNvPr>
-          <p:cNvSpPr>
-            <a:spLocks xmlns:a="http://schemas.openxmlformats.org/drawingml/2006/main" noGrp="1"/>
-          </p:cNvSpPr>
-          <p:nvPr/>
-        </p:nvSpPr>
-        <p:spPr>
-          <a:xfrm xmlns:a="http://schemas.openxmlformats.org/drawingml/2006/main">
-            <a:off x="5222748" y="3693795"/>
-            <a:ext cx="1323594" cy="826770"/>
+          <p:cNvPr id="34" name="mekko-3-2">
+            <a:extLst xmlns:a="http://schemas.openxmlformats.org/drawingml/2006/main">
+              <a:ext uri="{FF2B5EF4-FFF2-40B4-BE49-F238E27FC236}">
+                <a16:creationId xmlns:a16="http://schemas.microsoft.com/office/drawing/2014/main" id="{ADDD2BC6-1EB4-4A6F-A841-120C94392549}"/>
+              </a:ext>
+            </a:extLst>
+          </p:cNvPr>
+          <p:cNvSpPr>
+            <a:spLocks xmlns:a="http://schemas.openxmlformats.org/drawingml/2006/main" noGrp="1"/>
+          </p:cNvSpPr>
+          <p:nvPr/>
+        </p:nvSpPr>
+        <p:spPr>
+          <a:xfrm xmlns:a="http://schemas.openxmlformats.org/drawingml/2006/main">
+            <a:off x="5210493" y="4234614"/>
+            <a:ext cx="1348105" cy="466224"/>
           </a:xfrm>
           <a:prstGeom xmlns:a="http://schemas.openxmlformats.org/drawingml/2006/main" prst="rect">
             <a:avLst/>
@@ -2554,22 +2534,88 @@
       </p:sp>
       <p:sp>
         <p:nvSpPr>
-          <p:cNvPr id="36" name="mekko-label-3-2">
-            <a:extLst xmlns:a="http://schemas.openxmlformats.org/drawingml/2006/main">
-              <a:ext uri="{FF2B5EF4-FFF2-40B4-BE49-F238E27FC236}">
-                <a16:creationId xmlns:a16="http://schemas.microsoft.com/office/drawing/2014/main" id="{17392A92-40BE-40A9-AAFF-79646F91E5E2}"/>
-              </a:ext>
-            </a:extLst>
-          </p:cNvPr>
-          <p:cNvSpPr>
-            <a:spLocks xmlns:a="http://schemas.openxmlformats.org/drawingml/2006/main" noGrp="1"/>
-          </p:cNvSpPr>
-          <p:nvPr/>
-        </p:nvSpPr>
-        <p:spPr>
-          <a:xfrm xmlns:a="http://schemas.openxmlformats.org/drawingml/2006/main">
-            <a:off x="5260848" y="3973830"/>
-            <a:ext cx="1247394" cy="266700"/>
+          <p:cNvPr id="35" name="mekko-3-3">
+            <a:extLst xmlns:a="http://schemas.openxmlformats.org/drawingml/2006/main">
+              <a:ext uri="{FF2B5EF4-FFF2-40B4-BE49-F238E27FC236}">
+                <a16:creationId xmlns:a16="http://schemas.microsoft.com/office/drawing/2014/main" id="{DAAE15B3-BC34-44E9-B6A8-46C427A84CDF}"/>
+              </a:ext>
+            </a:extLst>
+          </p:cNvPr>
+          <p:cNvSpPr>
+            <a:spLocks xmlns:a="http://schemas.openxmlformats.org/drawingml/2006/main" noGrp="1"/>
+          </p:cNvSpPr>
+          <p:nvPr/>
+        </p:nvSpPr>
+        <p:spPr>
+          <a:xfrm xmlns:a="http://schemas.openxmlformats.org/drawingml/2006/main">
+            <a:off x="5210493" y="3846095"/>
+            <a:ext cx="1348105" cy="388520"/>
+          </a:xfrm>
+          <a:prstGeom xmlns:a="http://schemas.openxmlformats.org/drawingml/2006/main" prst="rect">
+            <a:avLst/>
+          </a:prstGeom>
+          <a:solidFill xmlns:a="http://schemas.openxmlformats.org/drawingml/2006/main">
+            <a:srgbClr val="2F6FB2"/>
+          </a:solidFill>
+          <a:ln xmlns:a="http://schemas.openxmlformats.org/drawingml/2006/main" w="11430">
+            <a:solidFill>
+              <a:srgbClr val="FFFFFF"/>
+            </a:solidFill>
+            <a:prstDash val="solid"/>
+          </a:ln>
+        </p:spPr>
+      </p:sp>
+      <p:sp>
+        <p:nvSpPr>
+          <p:cNvPr id="36" name="mekko-3-4">
+            <a:extLst xmlns:a="http://schemas.openxmlformats.org/drawingml/2006/main">
+              <a:ext uri="{FF2B5EF4-FFF2-40B4-BE49-F238E27FC236}">
+                <a16:creationId xmlns:a16="http://schemas.microsoft.com/office/drawing/2014/main" id="{A937FC1A-4E75-4966-9BD4-7CD131A59061}"/>
+              </a:ext>
+            </a:extLst>
+          </p:cNvPr>
+          <p:cNvSpPr>
+            <a:spLocks xmlns:a="http://schemas.openxmlformats.org/drawingml/2006/main" noGrp="1"/>
+          </p:cNvSpPr>
+          <p:nvPr/>
+        </p:nvSpPr>
+        <p:spPr>
+          <a:xfrm xmlns:a="http://schemas.openxmlformats.org/drawingml/2006/main">
+            <a:off x="5210493" y="3224463"/>
+            <a:ext cx="1348105" cy="621632"/>
+          </a:xfrm>
+          <a:prstGeom xmlns:a="http://schemas.openxmlformats.org/drawingml/2006/main" prst="rect">
+            <a:avLst/>
+          </a:prstGeom>
+          <a:solidFill xmlns:a="http://schemas.openxmlformats.org/drawingml/2006/main">
+            <a:srgbClr val="AEB8C6"/>
+          </a:solidFill>
+          <a:ln xmlns:a="http://schemas.openxmlformats.org/drawingml/2006/main" w="11430">
+            <a:solidFill>
+              <a:srgbClr val="FFFFFF"/>
+            </a:solidFill>
+            <a:prstDash val="solid"/>
+          </a:ln>
+        </p:spPr>
+      </p:sp>
+      <p:sp>
+        <p:nvSpPr>
+          <p:cNvPr id="37" name="mekko-label-3-4">
+            <a:extLst xmlns:a="http://schemas.openxmlformats.org/drawingml/2006/main">
+              <a:ext uri="{FF2B5EF4-FFF2-40B4-BE49-F238E27FC236}">
+                <a16:creationId xmlns:a16="http://schemas.microsoft.com/office/drawing/2014/main" id="{95A69CEB-62AD-4AC1-B2BF-9041DCAA5A5C}"/>
+              </a:ext>
+            </a:extLst>
+          </p:cNvPr>
+          <p:cNvSpPr>
+            <a:spLocks xmlns:a="http://schemas.openxmlformats.org/drawingml/2006/main" noGrp="1"/>
+          </p:cNvSpPr>
+          <p:nvPr/>
+        </p:nvSpPr>
+        <p:spPr>
+          <a:xfrm xmlns:a="http://schemas.openxmlformats.org/drawingml/2006/main">
+            <a:off x="5248593" y="3401929"/>
+            <a:ext cx="1271905" cy="266700"/>
           </a:xfrm>
           <a:prstGeom xmlns:a="http://schemas.openxmlformats.org/drawingml/2006/main" prst="rect">
             <a:avLst/>
@@ -2581,78 +2627,47 @@
           </a:ln>
         </p:spPr>
         <p:txBody>
-          <a:bodyPr xmlns:a="http://schemas.openxmlformats.org/drawingml/2006/main" anchor="ctr"/>
+          <a:bodyPr xmlns:a="http://schemas.openxmlformats.org/drawingml/2006/main" wrap="square" lIns="38100" tIns="19050" rIns="38100" bIns="19050" anchor="ctr">
+            <a:noAutofit/>
+          </a:bodyPr>
           <a:lstStyle xmlns:a="http://schemas.openxmlformats.org/drawingml/2006/main"/>
           <a:p xmlns:a="http://schemas.openxmlformats.org/drawingml/2006/main">
             <a:pPr algn="ctr">
               <a:defRPr sz="1600" b="0">
                 <a:solidFill>
-                  <a:srgbClr val="FFFFFF"/>
+                  <a:srgbClr val="172033"/>
                 </a:solidFill>
               </a:defRPr>
             </a:pPr>
             <a:r>
               <a:rPr sz="1600" b="0">
                 <a:solidFill>
-                  <a:srgbClr val="FFFFFF"/>
+                  <a:srgbClr val="172033"/>
                 </a:solidFill>
               </a:rPr>
-              <a:t>对手 A 28%</a:t>
+              <a:t>其他 ¥8亿</a:t>
             </a:r>
           </a:p>
         </p:txBody>
       </p:sp>
       <p:sp>
         <p:nvSpPr>
-          <p:cNvPr id="37" name="mekko-3-3">
-            <a:extLst xmlns:a="http://schemas.openxmlformats.org/drawingml/2006/main">
-              <a:ext uri="{FF2B5EF4-FFF2-40B4-BE49-F238E27FC236}">
-                <a16:creationId xmlns:a16="http://schemas.microsoft.com/office/drawing/2014/main" id="{A9404C32-EE87-4F6B-8997-D2BA2EF33984}"/>
-              </a:ext>
-            </a:extLst>
-          </p:cNvPr>
-          <p:cNvSpPr>
-            <a:spLocks xmlns:a="http://schemas.openxmlformats.org/drawingml/2006/main" noGrp="1"/>
-          </p:cNvSpPr>
-          <p:nvPr/>
-        </p:nvSpPr>
-        <p:spPr>
-          <a:xfrm xmlns:a="http://schemas.openxmlformats.org/drawingml/2006/main">
-            <a:off x="5222748" y="2985135"/>
-            <a:ext cx="1323594" cy="708660"/>
-          </a:xfrm>
-          <a:prstGeom xmlns:a="http://schemas.openxmlformats.org/drawingml/2006/main" prst="rect">
-            <a:avLst/>
-          </a:prstGeom>
-          <a:solidFill xmlns:a="http://schemas.openxmlformats.org/drawingml/2006/main">
-            <a:srgbClr val="2F6FB2"/>
-          </a:solidFill>
-          <a:ln xmlns:a="http://schemas.openxmlformats.org/drawingml/2006/main" w="11430">
-            <a:solidFill>
-              <a:srgbClr val="FFFFFF"/>
-            </a:solidFill>
-            <a:prstDash val="solid"/>
-          </a:ln>
-        </p:spPr>
-      </p:sp>
-      <p:sp>
-        <p:nvSpPr>
-          <p:cNvPr id="38" name="mekko-label-3-3">
-            <a:extLst xmlns:a="http://schemas.openxmlformats.org/drawingml/2006/main">
-              <a:ext uri="{FF2B5EF4-FFF2-40B4-BE49-F238E27FC236}">
-                <a16:creationId xmlns:a16="http://schemas.microsoft.com/office/drawing/2014/main" id="{AB402476-8072-4CFE-AA13-E4F9631EEBA4}"/>
-              </a:ext>
-            </a:extLst>
-          </p:cNvPr>
-          <p:cNvSpPr>
-            <a:spLocks xmlns:a="http://schemas.openxmlformats.org/drawingml/2006/main" noGrp="1"/>
-          </p:cNvSpPr>
-          <p:nvPr/>
-        </p:nvSpPr>
-        <p:spPr>
-          <a:xfrm xmlns:a="http://schemas.openxmlformats.org/drawingml/2006/main">
-            <a:off x="5260848" y="3206115"/>
-            <a:ext cx="1247394" cy="266700"/>
+          <p:cNvPr id="38" name="mekko-top-3">
+            <a:extLst xmlns:a="http://schemas.openxmlformats.org/drawingml/2006/main">
+              <a:ext uri="{FF2B5EF4-FFF2-40B4-BE49-F238E27FC236}">
+                <a16:creationId xmlns:a16="http://schemas.microsoft.com/office/drawing/2014/main" id="{11C7EC53-12B8-4CD0-A894-2C5AC4A08DF1}"/>
+              </a:ext>
+            </a:extLst>
+          </p:cNvPr>
+          <p:cNvSpPr>
+            <a:spLocks xmlns:a="http://schemas.openxmlformats.org/drawingml/2006/main" noGrp="1"/>
+          </p:cNvSpPr>
+          <p:nvPr/>
+        </p:nvSpPr>
+        <p:spPr>
+          <a:xfrm xmlns:a="http://schemas.openxmlformats.org/drawingml/2006/main">
+            <a:off x="5210493" y="1447800"/>
+            <a:ext cx="1348105" cy="457200"/>
           </a:xfrm>
           <a:prstGeom xmlns:a="http://schemas.openxmlformats.org/drawingml/2006/main" prst="rect">
             <a:avLst/>
@@ -2664,151 +2679,20 @@
           </a:ln>
         </p:spPr>
         <p:txBody>
-          <a:bodyPr xmlns:a="http://schemas.openxmlformats.org/drawingml/2006/main" anchor="ctr"/>
+          <a:bodyPr xmlns:a="http://schemas.openxmlformats.org/drawingml/2006/main" wrap="square" lIns="38100" tIns="19050" rIns="38100" bIns="19050" anchor="ctr">
+            <a:noAutofit/>
+          </a:bodyPr>
           <a:lstStyle xmlns:a="http://schemas.openxmlformats.org/drawingml/2006/main"/>
           <a:p xmlns:a="http://schemas.openxmlformats.org/drawingml/2006/main">
             <a:pPr algn="ctr">
-              <a:defRPr sz="1600" b="0">
-                <a:solidFill>
-                  <a:srgbClr val="FFFFFF"/>
+              <a:defRPr sz="1400" b="1">
+                <a:solidFill>
+                  <a:srgbClr val="15375F"/>
                 </a:solidFill>
               </a:defRPr>
             </a:pPr>
             <a:r>
-              <a:rPr sz="1600" b="0">
-                <a:solidFill>
-                  <a:srgbClr val="FFFFFF"/>
-                </a:solidFill>
-              </a:rPr>
-              <a:t>对手 B 24%</a:t>
-            </a:r>
-          </a:p>
-        </p:txBody>
-      </p:sp>
-      <p:sp>
-        <p:nvSpPr>
-          <p:cNvPr id="39" name="mekko-3-4">
-            <a:extLst xmlns:a="http://schemas.openxmlformats.org/drawingml/2006/main">
-              <a:ext uri="{FF2B5EF4-FFF2-40B4-BE49-F238E27FC236}">
-                <a16:creationId xmlns:a16="http://schemas.microsoft.com/office/drawing/2014/main" id="{BB67C35E-306E-4095-B526-8736A6349665}"/>
-              </a:ext>
-            </a:extLst>
-          </p:cNvPr>
-          <p:cNvSpPr>
-            <a:spLocks xmlns:a="http://schemas.openxmlformats.org/drawingml/2006/main" noGrp="1"/>
-          </p:cNvSpPr>
-          <p:nvPr/>
-        </p:nvSpPr>
-        <p:spPr>
-          <a:xfrm xmlns:a="http://schemas.openxmlformats.org/drawingml/2006/main">
-            <a:off x="5222748" y="1981200"/>
-            <a:ext cx="1323594" cy="1003935"/>
-          </a:xfrm>
-          <a:prstGeom xmlns:a="http://schemas.openxmlformats.org/drawingml/2006/main" prst="rect">
-            <a:avLst/>
-          </a:prstGeom>
-          <a:solidFill xmlns:a="http://schemas.openxmlformats.org/drawingml/2006/main">
-            <a:srgbClr val="AEB8C6"/>
-          </a:solidFill>
-          <a:ln xmlns:a="http://schemas.openxmlformats.org/drawingml/2006/main" w="11430">
-            <a:solidFill>
-              <a:srgbClr val="FFFFFF"/>
-            </a:solidFill>
-            <a:prstDash val="solid"/>
-          </a:ln>
-        </p:spPr>
-      </p:sp>
-      <p:sp>
-        <p:nvSpPr>
-          <p:cNvPr id="40" name="mekko-label-3-4">
-            <a:extLst xmlns:a="http://schemas.openxmlformats.org/drawingml/2006/main">
-              <a:ext uri="{FF2B5EF4-FFF2-40B4-BE49-F238E27FC236}">
-                <a16:creationId xmlns:a16="http://schemas.microsoft.com/office/drawing/2014/main" id="{44C7AB7D-B0C9-4B51-B832-DD79A916669E}"/>
-              </a:ext>
-            </a:extLst>
-          </p:cNvPr>
-          <p:cNvSpPr>
-            <a:spLocks xmlns:a="http://schemas.openxmlformats.org/drawingml/2006/main" noGrp="1"/>
-          </p:cNvSpPr>
-          <p:nvPr/>
-        </p:nvSpPr>
-        <p:spPr>
-          <a:xfrm xmlns:a="http://schemas.openxmlformats.org/drawingml/2006/main">
-            <a:off x="5260848" y="2349818"/>
-            <a:ext cx="1247394" cy="266700"/>
-          </a:xfrm>
-          <a:prstGeom xmlns:a="http://schemas.openxmlformats.org/drawingml/2006/main" prst="rect">
-            <a:avLst/>
-          </a:prstGeom>
-          <a:noFill xmlns:a="http://schemas.openxmlformats.org/drawingml/2006/main"/>
-          <a:ln xmlns:a="http://schemas.openxmlformats.org/drawingml/2006/main" w="0">
-            <a:noFill/>
-            <a:prstDash val="solid"/>
-          </a:ln>
-        </p:spPr>
-        <p:txBody>
-          <a:bodyPr xmlns:a="http://schemas.openxmlformats.org/drawingml/2006/main" anchor="ctr"/>
-          <a:lstStyle xmlns:a="http://schemas.openxmlformats.org/drawingml/2006/main"/>
-          <a:p xmlns:a="http://schemas.openxmlformats.org/drawingml/2006/main">
-            <a:pPr algn="ctr">
-              <a:defRPr sz="1600" b="0">
-                <a:solidFill>
-                  <a:srgbClr val="172033"/>
-                </a:solidFill>
-              </a:defRPr>
-            </a:pPr>
-            <a:r>
-              <a:rPr sz="1600" b="0">
-                <a:solidFill>
-                  <a:srgbClr val="172033"/>
-                </a:solidFill>
-              </a:rPr>
-              <a:t>其他 34%</a:t>
-            </a:r>
-          </a:p>
-        </p:txBody>
-      </p:sp>
-      <p:sp>
-        <p:nvSpPr>
-          <p:cNvPr id="41" name="mekko-top-3">
-            <a:extLst xmlns:a="http://schemas.openxmlformats.org/drawingml/2006/main">
-              <a:ext uri="{FF2B5EF4-FFF2-40B4-BE49-F238E27FC236}">
-                <a16:creationId xmlns:a16="http://schemas.microsoft.com/office/drawing/2014/main" id="{B14166C0-D4A4-4F2A-BDF9-03983867BC7F}"/>
-              </a:ext>
-            </a:extLst>
-          </p:cNvPr>
-          <p:cNvSpPr>
-            <a:spLocks xmlns:a="http://schemas.openxmlformats.org/drawingml/2006/main" noGrp="1"/>
-          </p:cNvSpPr>
-          <p:nvPr/>
-        </p:nvSpPr>
-        <p:spPr>
-          <a:xfrm xmlns:a="http://schemas.openxmlformats.org/drawingml/2006/main">
-            <a:off x="5222748" y="1447800"/>
-            <a:ext cx="1323594" cy="457200"/>
-          </a:xfrm>
-          <a:prstGeom xmlns:a="http://schemas.openxmlformats.org/drawingml/2006/main" prst="rect">
-            <a:avLst/>
-          </a:prstGeom>
-          <a:noFill xmlns:a="http://schemas.openxmlformats.org/drawingml/2006/main"/>
-          <a:ln xmlns:a="http://schemas.openxmlformats.org/drawingml/2006/main" w="0">
-            <a:noFill/>
-            <a:prstDash val="solid"/>
-          </a:ln>
-        </p:spPr>
-        <p:txBody>
-          <a:bodyPr xmlns:a="http://schemas.openxmlformats.org/drawingml/2006/main" anchor="ctr"/>
-          <a:lstStyle xmlns:a="http://schemas.openxmlformats.org/drawingml/2006/main"/>
-          <a:p xmlns:a="http://schemas.openxmlformats.org/drawingml/2006/main">
-            <a:pPr algn="ctr">
-              <a:defRPr sz="1600" b="1">
-                <a:solidFill>
-                  <a:srgbClr val="15375F"/>
-                </a:solidFill>
-              </a:defRPr>
-            </a:pPr>
-            <a:r>
-              <a:rPr sz="1600" b="1">
+              <a:rPr sz="1400" b="1">
                 <a:solidFill>
                   <a:srgbClr val="15375F"/>
                 </a:solidFill>
@@ -2818,41 +2702,41 @@
           </a:p>
           <a:p xmlns:a="http://schemas.openxmlformats.org/drawingml/2006/main">
             <a:pPr algn="ctr">
-              <a:defRPr sz="1600" b="1">
+              <a:defRPr sz="1400" b="1">
                 <a:solidFill>
                   <a:srgbClr val="15375F"/>
                 </a:solidFill>
               </a:defRPr>
             </a:pPr>
             <a:r>
-              <a:rPr sz="1600" b="1">
+              <a:rPr sz="1400" b="1">
                 <a:solidFill>
                   <a:srgbClr val="15375F"/>
                 </a:solidFill>
               </a:rPr>
-              <a:t>CAGR +5%</a:t>
+              <a:t>+5%</a:t>
             </a:r>
           </a:p>
         </p:txBody>
       </p:sp>
       <p:sp>
         <p:nvSpPr>
-          <p:cNvPr id="42" name="mekko-bottom-3">
-            <a:extLst xmlns:a="http://schemas.openxmlformats.org/drawingml/2006/main">
-              <a:ext uri="{FF2B5EF4-FFF2-40B4-BE49-F238E27FC236}">
-                <a16:creationId xmlns:a16="http://schemas.microsoft.com/office/drawing/2014/main" id="{9244A78A-C0D7-4817-89B5-4AF35EC9DE9E}"/>
-              </a:ext>
-            </a:extLst>
-          </p:cNvPr>
-          <p:cNvSpPr>
-            <a:spLocks xmlns:a="http://schemas.openxmlformats.org/drawingml/2006/main" noGrp="1"/>
-          </p:cNvSpPr>
-          <p:nvPr/>
-        </p:nvSpPr>
-        <p:spPr>
-          <a:xfrm xmlns:a="http://schemas.openxmlformats.org/drawingml/2006/main">
-            <a:off x="5222748" y="5010150"/>
-            <a:ext cx="1323594" cy="381000"/>
+          <p:cNvPr id="39" name="mekko-bottom-3">
+            <a:extLst xmlns:a="http://schemas.openxmlformats.org/drawingml/2006/main">
+              <a:ext uri="{FF2B5EF4-FFF2-40B4-BE49-F238E27FC236}">
+                <a16:creationId xmlns:a16="http://schemas.microsoft.com/office/drawing/2014/main" id="{C7823FF5-0B0A-4740-8420-89432E4CC44E}"/>
+              </a:ext>
+            </a:extLst>
+          </p:cNvPr>
+          <p:cNvSpPr>
+            <a:spLocks xmlns:a="http://schemas.openxmlformats.org/drawingml/2006/main" noGrp="1"/>
+          </p:cNvSpPr>
+          <p:nvPr/>
+        </p:nvSpPr>
+        <p:spPr>
+          <a:xfrm xmlns:a="http://schemas.openxmlformats.org/drawingml/2006/main">
+            <a:off x="5210493" y="5010150"/>
+            <a:ext cx="1348105" cy="381000"/>
           </a:xfrm>
           <a:prstGeom xmlns:a="http://schemas.openxmlformats.org/drawingml/2006/main" prst="rect">
             <a:avLst/>
@@ -2864,7 +2748,9 @@
           </a:ln>
         </p:spPr>
         <p:txBody>
-          <a:bodyPr xmlns:a="http://schemas.openxmlformats.org/drawingml/2006/main" anchor="ctr"/>
+          <a:bodyPr xmlns:a="http://schemas.openxmlformats.org/drawingml/2006/main" wrap="square" lIns="38100" tIns="19050" rIns="38100" bIns="19050" anchor="ctr">
+            <a:noAutofit/>
+          </a:bodyPr>
           <a:lstStyle xmlns:a="http://schemas.openxmlformats.org/drawingml/2006/main"/>
           <a:p xmlns:a="http://schemas.openxmlformats.org/drawingml/2006/main">
             <a:pPr algn="ctr">
@@ -2897,29 +2783,29 @@
                   <a:srgbClr val="172033"/>
                 </a:solidFill>
               </a:rPr>
-              <a:t>18%</a:t>
+              <a:t>¥22亿</a:t>
             </a:r>
           </a:p>
         </p:txBody>
       </p:sp>
       <p:sp>
         <p:nvSpPr>
-          <p:cNvPr id="43" name="mekko-4-1">
-            <a:extLst xmlns:a="http://schemas.openxmlformats.org/drawingml/2006/main">
-              <a:ext uri="{FF2B5EF4-FFF2-40B4-BE49-F238E27FC236}">
-                <a16:creationId xmlns:a16="http://schemas.microsoft.com/office/drawing/2014/main" id="{8225238E-B481-4D2A-94F8-451BB8A0E608}"/>
-              </a:ext>
-            </a:extLst>
-          </p:cNvPr>
-          <p:cNvSpPr>
-            <a:spLocks xmlns:a="http://schemas.openxmlformats.org/drawingml/2006/main" noGrp="1"/>
-          </p:cNvSpPr>
-          <p:nvPr/>
-        </p:nvSpPr>
-        <p:spPr>
-          <a:xfrm xmlns:a="http://schemas.openxmlformats.org/drawingml/2006/main">
-            <a:off x="6546342" y="4609148"/>
-            <a:ext cx="1102995" cy="324803"/>
+          <p:cNvPr id="40" name="mekko-4-1">
+            <a:extLst xmlns:a="http://schemas.openxmlformats.org/drawingml/2006/main">
+              <a:ext uri="{FF2B5EF4-FFF2-40B4-BE49-F238E27FC236}">
+                <a16:creationId xmlns:a16="http://schemas.microsoft.com/office/drawing/2014/main" id="{19BB2F0D-1524-434C-A9C6-D87570BDB395}"/>
+              </a:ext>
+            </a:extLst>
+          </p:cNvPr>
+          <p:cNvSpPr>
+            <a:spLocks xmlns:a="http://schemas.openxmlformats.org/drawingml/2006/main" noGrp="1"/>
+          </p:cNvSpPr>
+          <p:nvPr/>
+        </p:nvSpPr>
+        <p:spPr>
+          <a:xfrm xmlns:a="http://schemas.openxmlformats.org/drawingml/2006/main">
+            <a:off x="6558597" y="4778542"/>
+            <a:ext cx="1102995" cy="155408"/>
           </a:xfrm>
           <a:prstGeom xmlns:a="http://schemas.openxmlformats.org/drawingml/2006/main" prst="rect">
             <a:avLst/>
@@ -2937,22 +2823,22 @@
       </p:sp>
       <p:sp>
         <p:nvSpPr>
-          <p:cNvPr id="44" name="mekko-4-2">
-            <a:extLst xmlns:a="http://schemas.openxmlformats.org/drawingml/2006/main">
-              <a:ext uri="{FF2B5EF4-FFF2-40B4-BE49-F238E27FC236}">
-                <a16:creationId xmlns:a16="http://schemas.microsoft.com/office/drawing/2014/main" id="{2A6362CE-4258-4638-8A33-BBFFB6AE8B40}"/>
-              </a:ext>
-            </a:extLst>
-          </p:cNvPr>
-          <p:cNvSpPr>
-            <a:spLocks xmlns:a="http://schemas.openxmlformats.org/drawingml/2006/main" noGrp="1"/>
-          </p:cNvSpPr>
-          <p:nvPr/>
-        </p:nvSpPr>
-        <p:spPr>
-          <a:xfrm xmlns:a="http://schemas.openxmlformats.org/drawingml/2006/main">
-            <a:off x="6546342" y="3693795"/>
-            <a:ext cx="1102995" cy="915353"/>
+          <p:cNvPr id="41" name="mekko-4-2">
+            <a:extLst xmlns:a="http://schemas.openxmlformats.org/drawingml/2006/main">
+              <a:ext uri="{FF2B5EF4-FFF2-40B4-BE49-F238E27FC236}">
+                <a16:creationId xmlns:a16="http://schemas.microsoft.com/office/drawing/2014/main" id="{2F74C869-98FF-4481-92B4-23E7CCF5C963}"/>
+              </a:ext>
+            </a:extLst>
+          </p:cNvPr>
+          <p:cNvSpPr>
+            <a:spLocks xmlns:a="http://schemas.openxmlformats.org/drawingml/2006/main" noGrp="1"/>
+          </p:cNvSpPr>
+          <p:nvPr/>
+        </p:nvSpPr>
+        <p:spPr>
+          <a:xfrm xmlns:a="http://schemas.openxmlformats.org/drawingml/2006/main">
+            <a:off x="6558597" y="4312318"/>
+            <a:ext cx="1102995" cy="466224"/>
           </a:xfrm>
           <a:prstGeom xmlns:a="http://schemas.openxmlformats.org/drawingml/2006/main" prst="rect">
             <a:avLst/>
@@ -2970,72 +2856,22 @@
       </p:sp>
       <p:sp>
         <p:nvSpPr>
-          <p:cNvPr id="45" name="mekko-label-4-2">
-            <a:extLst xmlns:a="http://schemas.openxmlformats.org/drawingml/2006/main">
-              <a:ext uri="{FF2B5EF4-FFF2-40B4-BE49-F238E27FC236}">
-                <a16:creationId xmlns:a16="http://schemas.microsoft.com/office/drawing/2014/main" id="{D9BDDEBB-7D40-459F-A213-B1C5F21B1511}"/>
-              </a:ext>
-            </a:extLst>
-          </p:cNvPr>
-          <p:cNvSpPr>
-            <a:spLocks xmlns:a="http://schemas.openxmlformats.org/drawingml/2006/main" noGrp="1"/>
-          </p:cNvSpPr>
-          <p:nvPr/>
-        </p:nvSpPr>
-        <p:spPr>
-          <a:xfrm xmlns:a="http://schemas.openxmlformats.org/drawingml/2006/main">
-            <a:off x="6584442" y="4018121"/>
-            <a:ext cx="1026795" cy="266700"/>
-          </a:xfrm>
-          <a:prstGeom xmlns:a="http://schemas.openxmlformats.org/drawingml/2006/main" prst="rect">
-            <a:avLst/>
-          </a:prstGeom>
-          <a:noFill xmlns:a="http://schemas.openxmlformats.org/drawingml/2006/main"/>
-          <a:ln xmlns:a="http://schemas.openxmlformats.org/drawingml/2006/main" w="0">
-            <a:noFill/>
-            <a:prstDash val="solid"/>
-          </a:ln>
-        </p:spPr>
-        <p:txBody>
-          <a:bodyPr xmlns:a="http://schemas.openxmlformats.org/drawingml/2006/main" anchor="ctr"/>
-          <a:lstStyle xmlns:a="http://schemas.openxmlformats.org/drawingml/2006/main"/>
-          <a:p xmlns:a="http://schemas.openxmlformats.org/drawingml/2006/main">
-            <a:pPr algn="ctr">
-              <a:defRPr sz="1600" b="0">
-                <a:solidFill>
-                  <a:srgbClr val="FFFFFF"/>
-                </a:solidFill>
-              </a:defRPr>
-            </a:pPr>
-            <a:r>
-              <a:rPr sz="1600" b="0">
-                <a:solidFill>
-                  <a:srgbClr val="FFFFFF"/>
-                </a:solidFill>
-              </a:rPr>
-              <a:t>对手 A 31%</a:t>
-            </a:r>
-          </a:p>
-        </p:txBody>
-      </p:sp>
-      <p:sp>
-        <p:nvSpPr>
-          <p:cNvPr id="46" name="mekko-4-3">
-            <a:extLst xmlns:a="http://schemas.openxmlformats.org/drawingml/2006/main">
-              <a:ext uri="{FF2B5EF4-FFF2-40B4-BE49-F238E27FC236}">
-                <a16:creationId xmlns:a16="http://schemas.microsoft.com/office/drawing/2014/main" id="{9E8C379A-3555-4A47-96A9-8EEB64B11060}"/>
-              </a:ext>
-            </a:extLst>
-          </p:cNvPr>
-          <p:cNvSpPr>
-            <a:spLocks xmlns:a="http://schemas.openxmlformats.org/drawingml/2006/main" noGrp="1"/>
-          </p:cNvSpPr>
-          <p:nvPr/>
-        </p:nvSpPr>
-        <p:spPr>
-          <a:xfrm xmlns:a="http://schemas.openxmlformats.org/drawingml/2006/main">
-            <a:off x="6546342" y="3044190"/>
-            <a:ext cx="1102995" cy="649605"/>
+          <p:cNvPr id="42" name="mekko-4-3">
+            <a:extLst xmlns:a="http://schemas.openxmlformats.org/drawingml/2006/main">
+              <a:ext uri="{FF2B5EF4-FFF2-40B4-BE49-F238E27FC236}">
+                <a16:creationId xmlns:a16="http://schemas.microsoft.com/office/drawing/2014/main" id="{81D2FFCA-DD4E-4466-AA12-487A962CD295}"/>
+              </a:ext>
+            </a:extLst>
+          </p:cNvPr>
+          <p:cNvSpPr>
+            <a:spLocks xmlns:a="http://schemas.openxmlformats.org/drawingml/2006/main" noGrp="1"/>
+          </p:cNvSpPr>
+          <p:nvPr/>
+        </p:nvSpPr>
+        <p:spPr>
+          <a:xfrm xmlns:a="http://schemas.openxmlformats.org/drawingml/2006/main">
+            <a:off x="6558597" y="4001503"/>
+            <a:ext cx="1102995" cy="310816"/>
           </a:xfrm>
           <a:prstGeom xmlns:a="http://schemas.openxmlformats.org/drawingml/2006/main" prst="rect">
             <a:avLst/>
@@ -3053,72 +2889,22 @@
       </p:sp>
       <p:sp>
         <p:nvSpPr>
-          <p:cNvPr id="47" name="mekko-label-4-3">
-            <a:extLst xmlns:a="http://schemas.openxmlformats.org/drawingml/2006/main">
-              <a:ext uri="{FF2B5EF4-FFF2-40B4-BE49-F238E27FC236}">
-                <a16:creationId xmlns:a16="http://schemas.microsoft.com/office/drawing/2014/main" id="{6D38251F-B778-496F-A76E-1681D582B7EA}"/>
-              </a:ext>
-            </a:extLst>
-          </p:cNvPr>
-          <p:cNvSpPr>
-            <a:spLocks xmlns:a="http://schemas.openxmlformats.org/drawingml/2006/main" noGrp="1"/>
-          </p:cNvSpPr>
-          <p:nvPr/>
-        </p:nvSpPr>
-        <p:spPr>
-          <a:xfrm xmlns:a="http://schemas.openxmlformats.org/drawingml/2006/main">
-            <a:off x="6584442" y="3235643"/>
-            <a:ext cx="1026795" cy="266700"/>
-          </a:xfrm>
-          <a:prstGeom xmlns:a="http://schemas.openxmlformats.org/drawingml/2006/main" prst="rect">
-            <a:avLst/>
-          </a:prstGeom>
-          <a:noFill xmlns:a="http://schemas.openxmlformats.org/drawingml/2006/main"/>
-          <a:ln xmlns:a="http://schemas.openxmlformats.org/drawingml/2006/main" w="0">
-            <a:noFill/>
-            <a:prstDash val="solid"/>
-          </a:ln>
-        </p:spPr>
-        <p:txBody>
-          <a:bodyPr xmlns:a="http://schemas.openxmlformats.org/drawingml/2006/main" anchor="ctr"/>
-          <a:lstStyle xmlns:a="http://schemas.openxmlformats.org/drawingml/2006/main"/>
-          <a:p xmlns:a="http://schemas.openxmlformats.org/drawingml/2006/main">
-            <a:pPr algn="ctr">
-              <a:defRPr sz="1600" b="0">
-                <a:solidFill>
-                  <a:srgbClr val="FFFFFF"/>
-                </a:solidFill>
-              </a:defRPr>
-            </a:pPr>
-            <a:r>
-              <a:rPr sz="1600" b="0">
-                <a:solidFill>
-                  <a:srgbClr val="FFFFFF"/>
-                </a:solidFill>
-              </a:rPr>
-              <a:t>对手 B 22%</a:t>
-            </a:r>
-          </a:p>
-        </p:txBody>
-      </p:sp>
-      <p:sp>
-        <p:nvSpPr>
-          <p:cNvPr id="48" name="mekko-4-4">
-            <a:extLst xmlns:a="http://schemas.openxmlformats.org/drawingml/2006/main">
-              <a:ext uri="{FF2B5EF4-FFF2-40B4-BE49-F238E27FC236}">
-                <a16:creationId xmlns:a16="http://schemas.microsoft.com/office/drawing/2014/main" id="{B08FCC96-4368-4CCE-B2F9-EFE6D7F11755}"/>
-              </a:ext>
-            </a:extLst>
-          </p:cNvPr>
-          <p:cNvSpPr>
-            <a:spLocks xmlns:a="http://schemas.openxmlformats.org/drawingml/2006/main" noGrp="1"/>
-          </p:cNvSpPr>
-          <p:nvPr/>
-        </p:nvSpPr>
-        <p:spPr>
-          <a:xfrm xmlns:a="http://schemas.openxmlformats.org/drawingml/2006/main">
-            <a:off x="6546342" y="1981200"/>
-            <a:ext cx="1102995" cy="1062990"/>
+          <p:cNvPr id="43" name="mekko-4-4">
+            <a:extLst xmlns:a="http://schemas.openxmlformats.org/drawingml/2006/main">
+              <a:ext uri="{FF2B5EF4-FFF2-40B4-BE49-F238E27FC236}">
+                <a16:creationId xmlns:a16="http://schemas.microsoft.com/office/drawing/2014/main" id="{0625B812-1CB1-4D27-B945-5AB982E4ECAA}"/>
+              </a:ext>
+            </a:extLst>
+          </p:cNvPr>
+          <p:cNvSpPr>
+            <a:spLocks xmlns:a="http://schemas.openxmlformats.org/drawingml/2006/main" noGrp="1"/>
+          </p:cNvSpPr>
+          <p:nvPr/>
+        </p:nvSpPr>
+        <p:spPr>
+          <a:xfrm xmlns:a="http://schemas.openxmlformats.org/drawingml/2006/main">
+            <a:off x="6558597" y="3535279"/>
+            <a:ext cx="1102995" cy="466224"/>
           </a:xfrm>
           <a:prstGeom xmlns:a="http://schemas.openxmlformats.org/drawingml/2006/main" prst="rect">
             <a:avLst/>
@@ -3136,22 +2922,22 @@
       </p:sp>
       <p:sp>
         <p:nvSpPr>
-          <p:cNvPr id="49" name="mekko-label-4-4">
-            <a:extLst xmlns:a="http://schemas.openxmlformats.org/drawingml/2006/main">
-              <a:ext uri="{FF2B5EF4-FFF2-40B4-BE49-F238E27FC236}">
-                <a16:creationId xmlns:a16="http://schemas.microsoft.com/office/drawing/2014/main" id="{0518C3AF-C08D-403F-A7DE-88D964B93E6F}"/>
-              </a:ext>
-            </a:extLst>
-          </p:cNvPr>
-          <p:cNvSpPr>
-            <a:spLocks xmlns:a="http://schemas.openxmlformats.org/drawingml/2006/main" noGrp="1"/>
-          </p:cNvSpPr>
-          <p:nvPr/>
-        </p:nvSpPr>
-        <p:spPr>
-          <a:xfrm xmlns:a="http://schemas.openxmlformats.org/drawingml/2006/main">
-            <a:off x="6584442" y="2379345"/>
-            <a:ext cx="1026795" cy="266700"/>
+          <p:cNvPr id="44" name="mekko-top-4">
+            <a:extLst xmlns:a="http://schemas.openxmlformats.org/drawingml/2006/main">
+              <a:ext uri="{FF2B5EF4-FFF2-40B4-BE49-F238E27FC236}">
+                <a16:creationId xmlns:a16="http://schemas.microsoft.com/office/drawing/2014/main" id="{D0C07A80-8DAA-46BA-A19F-881C8A44E032}"/>
+              </a:ext>
+            </a:extLst>
+          </p:cNvPr>
+          <p:cNvSpPr>
+            <a:spLocks xmlns:a="http://schemas.openxmlformats.org/drawingml/2006/main" noGrp="1"/>
+          </p:cNvSpPr>
+          <p:nvPr/>
+        </p:nvSpPr>
+        <p:spPr>
+          <a:xfrm xmlns:a="http://schemas.openxmlformats.org/drawingml/2006/main">
+            <a:off x="6558597" y="1447800"/>
+            <a:ext cx="1102995" cy="457200"/>
           </a:xfrm>
           <a:prstGeom xmlns:a="http://schemas.openxmlformats.org/drawingml/2006/main" prst="rect">
             <a:avLst/>
@@ -3163,68 +2949,20 @@
           </a:ln>
         </p:spPr>
         <p:txBody>
-          <a:bodyPr xmlns:a="http://schemas.openxmlformats.org/drawingml/2006/main" anchor="ctr"/>
+          <a:bodyPr xmlns:a="http://schemas.openxmlformats.org/drawingml/2006/main" wrap="square" lIns="38100" tIns="19050" rIns="38100" bIns="19050" anchor="ctr">
+            <a:noAutofit/>
+          </a:bodyPr>
           <a:lstStyle xmlns:a="http://schemas.openxmlformats.org/drawingml/2006/main"/>
           <a:p xmlns:a="http://schemas.openxmlformats.org/drawingml/2006/main">
             <a:pPr algn="ctr">
-              <a:defRPr sz="1600" b="0">
-                <a:solidFill>
-                  <a:srgbClr val="172033"/>
+              <a:defRPr sz="1400" b="1">
+                <a:solidFill>
+                  <a:srgbClr val="15375F"/>
                 </a:solidFill>
               </a:defRPr>
             </a:pPr>
             <a:r>
-              <a:rPr sz="1600" b="0">
-                <a:solidFill>
-                  <a:srgbClr val="172033"/>
-                </a:solidFill>
-              </a:rPr>
-              <a:t>其他 36%</a:t>
-            </a:r>
-          </a:p>
-        </p:txBody>
-      </p:sp>
-      <p:sp>
-        <p:nvSpPr>
-          <p:cNvPr id="50" name="mekko-top-4">
-            <a:extLst xmlns:a="http://schemas.openxmlformats.org/drawingml/2006/main">
-              <a:ext uri="{FF2B5EF4-FFF2-40B4-BE49-F238E27FC236}">
-                <a16:creationId xmlns:a16="http://schemas.microsoft.com/office/drawing/2014/main" id="{406F13A2-E529-42B7-BBFB-6466C5A35196}"/>
-              </a:ext>
-            </a:extLst>
-          </p:cNvPr>
-          <p:cNvSpPr>
-            <a:spLocks xmlns:a="http://schemas.openxmlformats.org/drawingml/2006/main" noGrp="1"/>
-          </p:cNvSpPr>
-          <p:nvPr/>
-        </p:nvSpPr>
-        <p:spPr>
-          <a:xfrm xmlns:a="http://schemas.openxmlformats.org/drawingml/2006/main">
-            <a:off x="6546342" y="1447800"/>
-            <a:ext cx="1102995" cy="457200"/>
-          </a:xfrm>
-          <a:prstGeom xmlns:a="http://schemas.openxmlformats.org/drawingml/2006/main" prst="rect">
-            <a:avLst/>
-          </a:prstGeom>
-          <a:noFill xmlns:a="http://schemas.openxmlformats.org/drawingml/2006/main"/>
-          <a:ln xmlns:a="http://schemas.openxmlformats.org/drawingml/2006/main" w="0">
-            <a:noFill/>
-            <a:prstDash val="solid"/>
-          </a:ln>
-        </p:spPr>
-        <p:txBody>
-          <a:bodyPr xmlns:a="http://schemas.openxmlformats.org/drawingml/2006/main" anchor="ctr"/>
-          <a:lstStyle xmlns:a="http://schemas.openxmlformats.org/drawingml/2006/main"/>
-          <a:p xmlns:a="http://schemas.openxmlformats.org/drawingml/2006/main">
-            <a:pPr algn="ctr">
-              <a:defRPr sz="1600" b="1">
-                <a:solidFill>
-                  <a:srgbClr val="15375F"/>
-                </a:solidFill>
-              </a:defRPr>
-            </a:pPr>
-            <a:r>
-              <a:rPr sz="1600" b="1">
+              <a:rPr sz="1400" b="1">
                 <a:solidFill>
                   <a:srgbClr val="15375F"/>
                 </a:solidFill>
@@ -3234,40 +2972,40 @@
           </a:p>
           <a:p xmlns:a="http://schemas.openxmlformats.org/drawingml/2006/main">
             <a:pPr algn="ctr">
-              <a:defRPr sz="1600" b="1">
+              <a:defRPr sz="1400" b="1">
                 <a:solidFill>
                   <a:srgbClr val="15375F"/>
                 </a:solidFill>
               </a:defRPr>
             </a:pPr>
             <a:r>
-              <a:rPr sz="1600" b="1">
+              <a:rPr sz="1400" b="1">
                 <a:solidFill>
                   <a:srgbClr val="15375F"/>
                 </a:solidFill>
               </a:rPr>
-              <a:t>CAGR +7%</a:t>
+              <a:t>+7%</a:t>
             </a:r>
           </a:p>
         </p:txBody>
       </p:sp>
       <p:sp>
         <p:nvSpPr>
-          <p:cNvPr id="51" name="mekko-bottom-4">
-            <a:extLst xmlns:a="http://schemas.openxmlformats.org/drawingml/2006/main">
-              <a:ext uri="{FF2B5EF4-FFF2-40B4-BE49-F238E27FC236}">
-                <a16:creationId xmlns:a16="http://schemas.microsoft.com/office/drawing/2014/main" id="{A9EDBD25-B8C7-43C1-8E89-B347C3A36D46}"/>
-              </a:ext>
-            </a:extLst>
-          </p:cNvPr>
-          <p:cNvSpPr>
-            <a:spLocks xmlns:a="http://schemas.openxmlformats.org/drawingml/2006/main" noGrp="1"/>
-          </p:cNvSpPr>
-          <p:nvPr/>
-        </p:nvSpPr>
-        <p:spPr>
-          <a:xfrm xmlns:a="http://schemas.openxmlformats.org/drawingml/2006/main">
-            <a:off x="6546342" y="5010150"/>
+          <p:cNvPr id="45" name="mekko-bottom-4">
+            <a:extLst xmlns:a="http://schemas.openxmlformats.org/drawingml/2006/main">
+              <a:ext uri="{FF2B5EF4-FFF2-40B4-BE49-F238E27FC236}">
+                <a16:creationId xmlns:a16="http://schemas.microsoft.com/office/drawing/2014/main" id="{E3ABF6BB-B7D5-434D-B671-20F85D4C656A}"/>
+              </a:ext>
+            </a:extLst>
+          </p:cNvPr>
+          <p:cNvSpPr>
+            <a:spLocks xmlns:a="http://schemas.openxmlformats.org/drawingml/2006/main" noGrp="1"/>
+          </p:cNvSpPr>
+          <p:nvPr/>
+        </p:nvSpPr>
+        <p:spPr>
+          <a:xfrm xmlns:a="http://schemas.openxmlformats.org/drawingml/2006/main">
+            <a:off x="6558597" y="5010150"/>
             <a:ext cx="1102995" cy="381000"/>
           </a:xfrm>
           <a:prstGeom xmlns:a="http://schemas.openxmlformats.org/drawingml/2006/main" prst="rect">
@@ -3280,7 +3018,9 @@
           </a:ln>
         </p:spPr>
         <p:txBody>
-          <a:bodyPr xmlns:a="http://schemas.openxmlformats.org/drawingml/2006/main" anchor="ctr"/>
+          <a:bodyPr xmlns:a="http://schemas.openxmlformats.org/drawingml/2006/main" wrap="square" lIns="38100" tIns="19050" rIns="38100" bIns="19050" anchor="ctr">
+            <a:noAutofit/>
+          </a:bodyPr>
           <a:lstStyle xmlns:a="http://schemas.openxmlformats.org/drawingml/2006/main"/>
           <a:p xmlns:a="http://schemas.openxmlformats.org/drawingml/2006/main">
             <a:pPr algn="ctr">
@@ -3313,29 +3053,29 @@
                   <a:srgbClr val="172033"/>
                 </a:solidFill>
               </a:rPr>
-              <a:t>15%</a:t>
+              <a:t>¥18亿</a:t>
             </a:r>
           </a:p>
         </p:txBody>
       </p:sp>
       <p:sp>
         <p:nvSpPr>
-          <p:cNvPr id="52" name="mekko-5-1">
-            <a:extLst xmlns:a="http://schemas.openxmlformats.org/drawingml/2006/main">
-              <a:ext uri="{FF2B5EF4-FFF2-40B4-BE49-F238E27FC236}">
-                <a16:creationId xmlns:a16="http://schemas.microsoft.com/office/drawing/2014/main" id="{FEA5AECC-0C13-4B6A-BDE7-E692825155E2}"/>
-              </a:ext>
-            </a:extLst>
-          </p:cNvPr>
-          <p:cNvSpPr>
-            <a:spLocks xmlns:a="http://schemas.openxmlformats.org/drawingml/2006/main" noGrp="1"/>
-          </p:cNvSpPr>
-          <p:nvPr/>
-        </p:nvSpPr>
-        <p:spPr>
-          <a:xfrm xmlns:a="http://schemas.openxmlformats.org/drawingml/2006/main">
-            <a:off x="7649337" y="4402455"/>
-            <a:ext cx="808863" cy="531495"/>
+          <p:cNvPr id="46" name="mekko-5-1">
+            <a:extLst xmlns:a="http://schemas.openxmlformats.org/drawingml/2006/main">
+              <a:ext uri="{FF2B5EF4-FFF2-40B4-BE49-F238E27FC236}">
+                <a16:creationId xmlns:a16="http://schemas.microsoft.com/office/drawing/2014/main" id="{356A6C3D-C7A4-419A-94C2-0C89C90B2492}"/>
+              </a:ext>
+            </a:extLst>
+          </p:cNvPr>
+          <p:cNvSpPr>
+            <a:spLocks xmlns:a="http://schemas.openxmlformats.org/drawingml/2006/main" noGrp="1"/>
+          </p:cNvSpPr>
+          <p:nvPr/>
+        </p:nvSpPr>
+        <p:spPr>
+          <a:xfrm xmlns:a="http://schemas.openxmlformats.org/drawingml/2006/main">
+            <a:off x="7661592" y="4778542"/>
+            <a:ext cx="796608" cy="155408"/>
           </a:xfrm>
           <a:prstGeom xmlns:a="http://schemas.openxmlformats.org/drawingml/2006/main" prst="rect">
             <a:avLst/>
@@ -3353,72 +3093,22 @@
       </p:sp>
       <p:sp>
         <p:nvSpPr>
-          <p:cNvPr id="53" name="mekko-label-5-1">
-            <a:extLst xmlns:a="http://schemas.openxmlformats.org/drawingml/2006/main">
-              <a:ext uri="{FF2B5EF4-FFF2-40B4-BE49-F238E27FC236}">
-                <a16:creationId xmlns:a16="http://schemas.microsoft.com/office/drawing/2014/main" id="{956A9BB6-FF20-4EF6-AC9A-C3B918ECC056}"/>
-              </a:ext>
-            </a:extLst>
-          </p:cNvPr>
-          <p:cNvSpPr>
-            <a:spLocks xmlns:a="http://schemas.openxmlformats.org/drawingml/2006/main" noGrp="1"/>
-          </p:cNvSpPr>
-          <p:nvPr/>
-        </p:nvSpPr>
-        <p:spPr>
-          <a:xfrm xmlns:a="http://schemas.openxmlformats.org/drawingml/2006/main">
-            <a:off x="7687437" y="4534853"/>
-            <a:ext cx="732663" cy="266700"/>
-          </a:xfrm>
-          <a:prstGeom xmlns:a="http://schemas.openxmlformats.org/drawingml/2006/main" prst="rect">
-            <a:avLst/>
-          </a:prstGeom>
-          <a:noFill xmlns:a="http://schemas.openxmlformats.org/drawingml/2006/main"/>
-          <a:ln xmlns:a="http://schemas.openxmlformats.org/drawingml/2006/main" w="0">
-            <a:noFill/>
-            <a:prstDash val="solid"/>
-          </a:ln>
-        </p:spPr>
-        <p:txBody>
-          <a:bodyPr xmlns:a="http://schemas.openxmlformats.org/drawingml/2006/main" anchor="ctr"/>
-          <a:lstStyle xmlns:a="http://schemas.openxmlformats.org/drawingml/2006/main"/>
-          <a:p xmlns:a="http://schemas.openxmlformats.org/drawingml/2006/main">
-            <a:pPr algn="ctr">
-              <a:defRPr sz="1600" b="1">
-                <a:solidFill>
-                  <a:srgbClr val="FFFFFF"/>
-                </a:solidFill>
-              </a:defRPr>
-            </a:pPr>
-            <a:r>
-              <a:rPr sz="1600" b="1">
-                <a:solidFill>
-                  <a:srgbClr val="FFFFFF"/>
-                </a:solidFill>
-              </a:rPr>
-              <a:t>我方 18%</a:t>
-            </a:r>
-          </a:p>
-        </p:txBody>
-      </p:sp>
-      <p:sp>
-        <p:nvSpPr>
-          <p:cNvPr id="54" name="mekko-5-2">
-            <a:extLst xmlns:a="http://schemas.openxmlformats.org/drawingml/2006/main">
-              <a:ext uri="{FF2B5EF4-FFF2-40B4-BE49-F238E27FC236}">
-                <a16:creationId xmlns:a16="http://schemas.microsoft.com/office/drawing/2014/main" id="{0549EB97-6ADD-4E96-9EA2-0E51673D4AE1}"/>
-              </a:ext>
-            </a:extLst>
-          </p:cNvPr>
-          <p:cNvSpPr>
-            <a:spLocks xmlns:a="http://schemas.openxmlformats.org/drawingml/2006/main" noGrp="1"/>
-          </p:cNvSpPr>
-          <p:nvPr/>
-        </p:nvSpPr>
-        <p:spPr>
-          <a:xfrm xmlns:a="http://schemas.openxmlformats.org/drawingml/2006/main">
-            <a:off x="7649337" y="3664268"/>
-            <a:ext cx="808863" cy="738188"/>
+          <p:cNvPr id="47" name="mekko-5-2">
+            <a:extLst xmlns:a="http://schemas.openxmlformats.org/drawingml/2006/main">
+              <a:ext uri="{FF2B5EF4-FFF2-40B4-BE49-F238E27FC236}">
+                <a16:creationId xmlns:a16="http://schemas.microsoft.com/office/drawing/2014/main" id="{CD5B1C8A-B0D4-4A51-A061-0509C4EB4AB2}"/>
+              </a:ext>
+            </a:extLst>
+          </p:cNvPr>
+          <p:cNvSpPr>
+            <a:spLocks xmlns:a="http://schemas.openxmlformats.org/drawingml/2006/main" noGrp="1"/>
+          </p:cNvSpPr>
+          <p:nvPr/>
+        </p:nvSpPr>
+        <p:spPr>
+          <a:xfrm xmlns:a="http://schemas.openxmlformats.org/drawingml/2006/main">
+            <a:off x="7661592" y="4545430"/>
+            <a:ext cx="796608" cy="233112"/>
           </a:xfrm>
           <a:prstGeom xmlns:a="http://schemas.openxmlformats.org/drawingml/2006/main" prst="rect">
             <a:avLst/>
@@ -3436,72 +3126,22 @@
       </p:sp>
       <p:sp>
         <p:nvSpPr>
-          <p:cNvPr id="55" name="mekko-label-5-2">
-            <a:extLst xmlns:a="http://schemas.openxmlformats.org/drawingml/2006/main">
-              <a:ext uri="{FF2B5EF4-FFF2-40B4-BE49-F238E27FC236}">
-                <a16:creationId xmlns:a16="http://schemas.microsoft.com/office/drawing/2014/main" id="{92AD14E1-8F03-4BDB-8463-D8B34117D310}"/>
-              </a:ext>
-            </a:extLst>
-          </p:cNvPr>
-          <p:cNvSpPr>
-            <a:spLocks xmlns:a="http://schemas.openxmlformats.org/drawingml/2006/main" noGrp="1"/>
-          </p:cNvSpPr>
-          <p:nvPr/>
-        </p:nvSpPr>
-        <p:spPr>
-          <a:xfrm xmlns:a="http://schemas.openxmlformats.org/drawingml/2006/main">
-            <a:off x="7687437" y="3900011"/>
-            <a:ext cx="732663" cy="266700"/>
-          </a:xfrm>
-          <a:prstGeom xmlns:a="http://schemas.openxmlformats.org/drawingml/2006/main" prst="rect">
-            <a:avLst/>
-          </a:prstGeom>
-          <a:noFill xmlns:a="http://schemas.openxmlformats.org/drawingml/2006/main"/>
-          <a:ln xmlns:a="http://schemas.openxmlformats.org/drawingml/2006/main" w="0">
-            <a:noFill/>
-            <a:prstDash val="solid"/>
-          </a:ln>
-        </p:spPr>
-        <p:txBody>
-          <a:bodyPr xmlns:a="http://schemas.openxmlformats.org/drawingml/2006/main" anchor="ctr"/>
-          <a:lstStyle xmlns:a="http://schemas.openxmlformats.org/drawingml/2006/main"/>
-          <a:p xmlns:a="http://schemas.openxmlformats.org/drawingml/2006/main">
-            <a:pPr algn="ctr">
-              <a:defRPr sz="1600" b="0">
-                <a:solidFill>
-                  <a:srgbClr val="FFFFFF"/>
-                </a:solidFill>
-              </a:defRPr>
-            </a:pPr>
-            <a:r>
-              <a:rPr sz="1600" b="0">
-                <a:solidFill>
-                  <a:srgbClr val="FFFFFF"/>
-                </a:solidFill>
-              </a:rPr>
-              <a:t>对手 A 25%</a:t>
-            </a:r>
-          </a:p>
-        </p:txBody>
-      </p:sp>
-      <p:sp>
-        <p:nvSpPr>
-          <p:cNvPr id="56" name="mekko-5-3">
-            <a:extLst xmlns:a="http://schemas.openxmlformats.org/drawingml/2006/main">
-              <a:ext uri="{FF2B5EF4-FFF2-40B4-BE49-F238E27FC236}">
-                <a16:creationId xmlns:a16="http://schemas.microsoft.com/office/drawing/2014/main" id="{B89F3A24-A0F2-48D2-BEB6-9CB23F755A88}"/>
-              </a:ext>
-            </a:extLst>
-          </p:cNvPr>
-          <p:cNvSpPr>
-            <a:spLocks xmlns:a="http://schemas.openxmlformats.org/drawingml/2006/main" noGrp="1"/>
-          </p:cNvSpPr>
-          <p:nvPr/>
-        </p:nvSpPr>
-        <p:spPr>
-          <a:xfrm xmlns:a="http://schemas.openxmlformats.org/drawingml/2006/main">
-            <a:off x="7649337" y="3073718"/>
-            <a:ext cx="808863" cy="590550"/>
+          <p:cNvPr id="48" name="mekko-5-3">
+            <a:extLst xmlns:a="http://schemas.openxmlformats.org/drawingml/2006/main">
+              <a:ext uri="{FF2B5EF4-FFF2-40B4-BE49-F238E27FC236}">
+                <a16:creationId xmlns:a16="http://schemas.microsoft.com/office/drawing/2014/main" id="{F6CDB012-E30B-4145-BB05-B3E8CB728C06}"/>
+              </a:ext>
+            </a:extLst>
+          </p:cNvPr>
+          <p:cNvSpPr>
+            <a:spLocks xmlns:a="http://schemas.openxmlformats.org/drawingml/2006/main" noGrp="1"/>
+          </p:cNvSpPr>
+          <p:nvPr/>
+        </p:nvSpPr>
+        <p:spPr>
+          <a:xfrm xmlns:a="http://schemas.openxmlformats.org/drawingml/2006/main">
+            <a:off x="7661592" y="4312318"/>
+            <a:ext cx="796608" cy="233112"/>
           </a:xfrm>
           <a:prstGeom xmlns:a="http://schemas.openxmlformats.org/drawingml/2006/main" prst="rect">
             <a:avLst/>
@@ -3519,72 +3159,22 @@
       </p:sp>
       <p:sp>
         <p:nvSpPr>
-          <p:cNvPr id="57" name="mekko-label-5-3">
-            <a:extLst xmlns:a="http://schemas.openxmlformats.org/drawingml/2006/main">
-              <a:ext uri="{FF2B5EF4-FFF2-40B4-BE49-F238E27FC236}">
-                <a16:creationId xmlns:a16="http://schemas.microsoft.com/office/drawing/2014/main" id="{4855F6F9-3E4C-4DE2-8BD8-CDCA782BD137}"/>
-              </a:ext>
-            </a:extLst>
-          </p:cNvPr>
-          <p:cNvSpPr>
-            <a:spLocks xmlns:a="http://schemas.openxmlformats.org/drawingml/2006/main" noGrp="1"/>
-          </p:cNvSpPr>
-          <p:nvPr/>
-        </p:nvSpPr>
-        <p:spPr>
-          <a:xfrm xmlns:a="http://schemas.openxmlformats.org/drawingml/2006/main">
-            <a:off x="7687437" y="3235643"/>
-            <a:ext cx="732663" cy="266700"/>
-          </a:xfrm>
-          <a:prstGeom xmlns:a="http://schemas.openxmlformats.org/drawingml/2006/main" prst="rect">
-            <a:avLst/>
-          </a:prstGeom>
-          <a:noFill xmlns:a="http://schemas.openxmlformats.org/drawingml/2006/main"/>
-          <a:ln xmlns:a="http://schemas.openxmlformats.org/drawingml/2006/main" w="0">
-            <a:noFill/>
-            <a:prstDash val="solid"/>
-          </a:ln>
-        </p:spPr>
-        <p:txBody>
-          <a:bodyPr xmlns:a="http://schemas.openxmlformats.org/drawingml/2006/main" anchor="ctr"/>
-          <a:lstStyle xmlns:a="http://schemas.openxmlformats.org/drawingml/2006/main"/>
-          <a:p xmlns:a="http://schemas.openxmlformats.org/drawingml/2006/main">
-            <a:pPr algn="ctr">
-              <a:defRPr sz="1600" b="0">
-                <a:solidFill>
-                  <a:srgbClr val="FFFFFF"/>
-                </a:solidFill>
-              </a:defRPr>
-            </a:pPr>
-            <a:r>
-              <a:rPr sz="1600" b="0">
-                <a:solidFill>
-                  <a:srgbClr val="FFFFFF"/>
-                </a:solidFill>
-              </a:rPr>
-              <a:t>对手 B 20%</a:t>
-            </a:r>
-          </a:p>
-        </p:txBody>
-      </p:sp>
-      <p:sp>
-        <p:nvSpPr>
-          <p:cNvPr id="58" name="mekko-5-4">
-            <a:extLst xmlns:a="http://schemas.openxmlformats.org/drawingml/2006/main">
-              <a:ext uri="{FF2B5EF4-FFF2-40B4-BE49-F238E27FC236}">
-                <a16:creationId xmlns:a16="http://schemas.microsoft.com/office/drawing/2014/main" id="{235B35AB-11A7-4C3A-A1DC-D355FDF4AE41}"/>
-              </a:ext>
-            </a:extLst>
-          </p:cNvPr>
-          <p:cNvSpPr>
-            <a:spLocks xmlns:a="http://schemas.openxmlformats.org/drawingml/2006/main" noGrp="1"/>
-          </p:cNvSpPr>
-          <p:nvPr/>
-        </p:nvSpPr>
-        <p:spPr>
-          <a:xfrm xmlns:a="http://schemas.openxmlformats.org/drawingml/2006/main">
-            <a:off x="7649337" y="1981200"/>
-            <a:ext cx="808863" cy="1092518"/>
+          <p:cNvPr id="49" name="mekko-5-4">
+            <a:extLst xmlns:a="http://schemas.openxmlformats.org/drawingml/2006/main">
+              <a:ext uri="{FF2B5EF4-FFF2-40B4-BE49-F238E27FC236}">
+                <a16:creationId xmlns:a16="http://schemas.microsoft.com/office/drawing/2014/main" id="{B924178F-E37E-418B-A474-9CB27507020B}"/>
+              </a:ext>
+            </a:extLst>
+          </p:cNvPr>
+          <p:cNvSpPr>
+            <a:spLocks xmlns:a="http://schemas.openxmlformats.org/drawingml/2006/main" noGrp="1"/>
+          </p:cNvSpPr>
+          <p:nvPr/>
+        </p:nvSpPr>
+        <p:spPr>
+          <a:xfrm xmlns:a="http://schemas.openxmlformats.org/drawingml/2006/main">
+            <a:off x="7661592" y="3923799"/>
+            <a:ext cx="796608" cy="388520"/>
           </a:xfrm>
           <a:prstGeom xmlns:a="http://schemas.openxmlformats.org/drawingml/2006/main" prst="rect">
             <a:avLst/>
@@ -3602,22 +3192,22 @@
       </p:sp>
       <p:sp>
         <p:nvSpPr>
-          <p:cNvPr id="59" name="mekko-label-5-4">
-            <a:extLst xmlns:a="http://schemas.openxmlformats.org/drawingml/2006/main">
-              <a:ext uri="{FF2B5EF4-FFF2-40B4-BE49-F238E27FC236}">
-                <a16:creationId xmlns:a16="http://schemas.microsoft.com/office/drawing/2014/main" id="{97D58B1E-05C0-4DC6-9FA7-9F019E3FE7C7}"/>
-              </a:ext>
-            </a:extLst>
-          </p:cNvPr>
-          <p:cNvSpPr>
-            <a:spLocks xmlns:a="http://schemas.openxmlformats.org/drawingml/2006/main" noGrp="1"/>
-          </p:cNvSpPr>
-          <p:nvPr/>
-        </p:nvSpPr>
-        <p:spPr>
-          <a:xfrm xmlns:a="http://schemas.openxmlformats.org/drawingml/2006/main">
-            <a:off x="7687437" y="2394109"/>
-            <a:ext cx="732663" cy="266700"/>
+          <p:cNvPr id="50" name="mekko-top-5">
+            <a:extLst xmlns:a="http://schemas.openxmlformats.org/drawingml/2006/main">
+              <a:ext uri="{FF2B5EF4-FFF2-40B4-BE49-F238E27FC236}">
+                <a16:creationId xmlns:a16="http://schemas.microsoft.com/office/drawing/2014/main" id="{FB3E1761-FF3A-40AB-B6E4-66A4D8BA4950}"/>
+              </a:ext>
+            </a:extLst>
+          </p:cNvPr>
+          <p:cNvSpPr>
+            <a:spLocks xmlns:a="http://schemas.openxmlformats.org/drawingml/2006/main" noGrp="1"/>
+          </p:cNvSpPr>
+          <p:nvPr/>
+        </p:nvSpPr>
+        <p:spPr>
+          <a:xfrm xmlns:a="http://schemas.openxmlformats.org/drawingml/2006/main">
+            <a:off x="7661592" y="1447800"/>
+            <a:ext cx="796608" cy="457200"/>
           </a:xfrm>
           <a:prstGeom xmlns:a="http://schemas.openxmlformats.org/drawingml/2006/main" prst="rect">
             <a:avLst/>
@@ -3629,68 +3219,20 @@
           </a:ln>
         </p:spPr>
         <p:txBody>
-          <a:bodyPr xmlns:a="http://schemas.openxmlformats.org/drawingml/2006/main" anchor="ctr"/>
+          <a:bodyPr xmlns:a="http://schemas.openxmlformats.org/drawingml/2006/main" wrap="square" lIns="38100" tIns="19050" rIns="38100" bIns="19050" anchor="ctr">
+            <a:noAutofit/>
+          </a:bodyPr>
           <a:lstStyle xmlns:a="http://schemas.openxmlformats.org/drawingml/2006/main"/>
           <a:p xmlns:a="http://schemas.openxmlformats.org/drawingml/2006/main">
             <a:pPr algn="ctr">
-              <a:defRPr sz="1600" b="0">
-                <a:solidFill>
-                  <a:srgbClr val="172033"/>
+              <a:defRPr sz="1400" b="1">
+                <a:solidFill>
+                  <a:srgbClr val="15375F"/>
                 </a:solidFill>
               </a:defRPr>
             </a:pPr>
             <a:r>
-              <a:rPr sz="1600" b="0">
-                <a:solidFill>
-                  <a:srgbClr val="172033"/>
-                </a:solidFill>
-              </a:rPr>
-              <a:t>其他 37%</a:t>
-            </a:r>
-          </a:p>
-        </p:txBody>
-      </p:sp>
-      <p:sp>
-        <p:nvSpPr>
-          <p:cNvPr id="60" name="mekko-top-5">
-            <a:extLst xmlns:a="http://schemas.openxmlformats.org/drawingml/2006/main">
-              <a:ext uri="{FF2B5EF4-FFF2-40B4-BE49-F238E27FC236}">
-                <a16:creationId xmlns:a16="http://schemas.microsoft.com/office/drawing/2014/main" id="{40204369-ABBB-41E4-9526-7B0ABC72C089}"/>
-              </a:ext>
-            </a:extLst>
-          </p:cNvPr>
-          <p:cNvSpPr>
-            <a:spLocks xmlns:a="http://schemas.openxmlformats.org/drawingml/2006/main" noGrp="1"/>
-          </p:cNvSpPr>
-          <p:nvPr/>
-        </p:nvSpPr>
-        <p:spPr>
-          <a:xfrm xmlns:a="http://schemas.openxmlformats.org/drawingml/2006/main">
-            <a:off x="7649337" y="1447800"/>
-            <a:ext cx="808863" cy="457200"/>
-          </a:xfrm>
-          <a:prstGeom xmlns:a="http://schemas.openxmlformats.org/drawingml/2006/main" prst="rect">
-            <a:avLst/>
-          </a:prstGeom>
-          <a:noFill xmlns:a="http://schemas.openxmlformats.org/drawingml/2006/main"/>
-          <a:ln xmlns:a="http://schemas.openxmlformats.org/drawingml/2006/main" w="0">
-            <a:noFill/>
-            <a:prstDash val="solid"/>
-          </a:ln>
-        </p:spPr>
-        <p:txBody>
-          <a:bodyPr xmlns:a="http://schemas.openxmlformats.org/drawingml/2006/main" anchor="ctr"/>
-          <a:lstStyle xmlns:a="http://schemas.openxmlformats.org/drawingml/2006/main"/>
-          <a:p xmlns:a="http://schemas.openxmlformats.org/drawingml/2006/main">
-            <a:pPr algn="ctr">
-              <a:defRPr sz="1600" b="1">
-                <a:solidFill>
-                  <a:srgbClr val="15375F"/>
-                </a:solidFill>
-              </a:defRPr>
-            </a:pPr>
-            <a:r>
-              <a:rPr sz="1600" b="1">
+              <a:rPr sz="1400" b="1">
                 <a:solidFill>
                   <a:srgbClr val="15375F"/>
                 </a:solidFill>
@@ -3700,41 +3242,41 @@
           </a:p>
           <a:p xmlns:a="http://schemas.openxmlformats.org/drawingml/2006/main">
             <a:pPr algn="ctr">
-              <a:defRPr sz="1600" b="1">
+              <a:defRPr sz="1400" b="1">
                 <a:solidFill>
                   <a:srgbClr val="15375F"/>
                 </a:solidFill>
               </a:defRPr>
             </a:pPr>
             <a:r>
-              <a:rPr sz="1600" b="1">
+              <a:rPr sz="1400" b="1">
                 <a:solidFill>
                   <a:srgbClr val="15375F"/>
                 </a:solidFill>
               </a:rPr>
-              <a:t>CAGR +3%</a:t>
+              <a:t>+3%</a:t>
             </a:r>
           </a:p>
         </p:txBody>
       </p:sp>
       <p:sp>
         <p:nvSpPr>
-          <p:cNvPr id="61" name="mekko-bottom-5">
-            <a:extLst xmlns:a="http://schemas.openxmlformats.org/drawingml/2006/main">
-              <a:ext uri="{FF2B5EF4-FFF2-40B4-BE49-F238E27FC236}">
-                <a16:creationId xmlns:a16="http://schemas.microsoft.com/office/drawing/2014/main" id="{897456FA-DB68-44F5-B5DC-DFDD68C87F25}"/>
-              </a:ext>
-            </a:extLst>
-          </p:cNvPr>
-          <p:cNvSpPr>
-            <a:spLocks xmlns:a="http://schemas.openxmlformats.org/drawingml/2006/main" noGrp="1"/>
-          </p:cNvSpPr>
-          <p:nvPr/>
-        </p:nvSpPr>
-        <p:spPr>
-          <a:xfrm xmlns:a="http://schemas.openxmlformats.org/drawingml/2006/main">
-            <a:off x="7649337" y="5010150"/>
-            <a:ext cx="808863" cy="381000"/>
+          <p:cNvPr id="51" name="mekko-bottom-5">
+            <a:extLst xmlns:a="http://schemas.openxmlformats.org/drawingml/2006/main">
+              <a:ext uri="{FF2B5EF4-FFF2-40B4-BE49-F238E27FC236}">
+                <a16:creationId xmlns:a16="http://schemas.microsoft.com/office/drawing/2014/main" id="{6064C83B-B7D8-41E0-8971-ADC3F2536C4C}"/>
+              </a:ext>
+            </a:extLst>
+          </p:cNvPr>
+          <p:cNvSpPr>
+            <a:spLocks xmlns:a="http://schemas.openxmlformats.org/drawingml/2006/main" noGrp="1"/>
+          </p:cNvSpPr>
+          <p:nvPr/>
+        </p:nvSpPr>
+        <p:spPr>
+          <a:xfrm xmlns:a="http://schemas.openxmlformats.org/drawingml/2006/main">
+            <a:off x="7661592" y="5010150"/>
+            <a:ext cx="796608" cy="381000"/>
           </a:xfrm>
           <a:prstGeom xmlns:a="http://schemas.openxmlformats.org/drawingml/2006/main" prst="rect">
             <a:avLst/>
@@ -3746,7 +3288,9 @@
           </a:ln>
         </p:spPr>
         <p:txBody>
-          <a:bodyPr xmlns:a="http://schemas.openxmlformats.org/drawingml/2006/main" anchor="ctr"/>
+          <a:bodyPr xmlns:a="http://schemas.openxmlformats.org/drawingml/2006/main" wrap="square" lIns="38100" tIns="19050" rIns="38100" bIns="19050" anchor="ctr">
+            <a:noAutofit/>
+          </a:bodyPr>
           <a:lstStyle xmlns:a="http://schemas.openxmlformats.org/drawingml/2006/main"/>
           <a:p xmlns:a="http://schemas.openxmlformats.org/drawingml/2006/main">
             <a:pPr algn="ctr">
@@ -3779,17 +3323,17 @@
                   <a:srgbClr val="172033"/>
                 </a:solidFill>
               </a:rPr>
-              <a:t>11%</a:t>
+              <a:t>¥13亿</a:t>
             </a:r>
           </a:p>
         </p:txBody>
       </p:sp>
       <p:sp>
         <p:nvSpPr>
-          <p:cNvPr id="62" name="关键洞察-rail">
-            <a:extLst xmlns:a="http://schemas.openxmlformats.org/drawingml/2006/main">
-              <a:ext uri="{FF2B5EF4-FFF2-40B4-BE49-F238E27FC236}">
-                <a16:creationId xmlns:a16="http://schemas.microsoft.com/office/drawing/2014/main" id="{F8648E36-7997-4A18-ABCD-F3B28F87B651}"/>
+          <p:cNvPr id="52" name="关键洞察-rail">
+            <a:extLst xmlns:a="http://schemas.openxmlformats.org/drawingml/2006/main">
+              <a:ext uri="{FF2B5EF4-FFF2-40B4-BE49-F238E27FC236}">
+                <a16:creationId xmlns:a16="http://schemas.microsoft.com/office/drawing/2014/main" id="{5C81F436-5A83-43EB-92B4-44172655FFEE}"/>
               </a:ext>
             </a:extLst>
           </p:cNvPr>
@@ -3803,10 +3347,8 @@
             <a:off x="8991600" y="1200150"/>
             <a:ext cx="2686050" cy="4476750"/>
           </a:xfrm>
-          <a:prstGeom xmlns:a="http://schemas.openxmlformats.org/drawingml/2006/main" prst="roundRect">
-            <a:avLst>
-              <a:gd name="adj" fmla="val 2837"/>
-            </a:avLst>
+          <a:prstGeom xmlns:a="http://schemas.openxmlformats.org/drawingml/2006/main" prst="rect">
+            <a:avLst/>
           </a:prstGeom>
           <a:solidFill xmlns:a="http://schemas.openxmlformats.org/drawingml/2006/main">
             <a:srgbClr val="F4F6F8"/>
@@ -3821,10 +3363,10 @@
       </p:sp>
       <p:sp>
         <p:nvSpPr>
-          <p:cNvPr id="63" name="关键洞察-title">
-            <a:extLst xmlns:a="http://schemas.openxmlformats.org/drawingml/2006/main">
-              <a:ext uri="{FF2B5EF4-FFF2-40B4-BE49-F238E27FC236}">
-                <a16:creationId xmlns:a16="http://schemas.microsoft.com/office/drawing/2014/main" id="{087E3AE0-394C-4CAC-AF86-5F33ED77E086}"/>
+          <p:cNvPr id="53" name="关键洞察-title">
+            <a:extLst xmlns:a="http://schemas.openxmlformats.org/drawingml/2006/main">
+              <a:ext uri="{FF2B5EF4-FFF2-40B4-BE49-F238E27FC236}">
+                <a16:creationId xmlns:a16="http://schemas.microsoft.com/office/drawing/2014/main" id="{E31F4499-B6EE-496F-8ED3-26A506B605CB}"/>
               </a:ext>
             </a:extLst>
           </p:cNvPr>
@@ -3848,18 +3390,20 @@
           </a:ln>
         </p:spPr>
         <p:txBody>
-          <a:bodyPr xmlns:a="http://schemas.openxmlformats.org/drawingml/2006/main" anchor="ctr"/>
+          <a:bodyPr xmlns:a="http://schemas.openxmlformats.org/drawingml/2006/main" wrap="square" lIns="38100" tIns="19050" rIns="38100" bIns="19050" anchor="ctr">
+            <a:noAutofit/>
+          </a:bodyPr>
           <a:lstStyle xmlns:a="http://schemas.openxmlformats.org/drawingml/2006/main"/>
           <a:p xmlns:a="http://schemas.openxmlformats.org/drawingml/2006/main">
             <a:pPr algn="l">
-              <a:defRPr sz="1600" b="1">
+              <a:defRPr sz="1800" b="1">
                 <a:solidFill>
                   <a:srgbClr val="15375F"/>
                 </a:solidFill>
               </a:defRPr>
             </a:pPr>
             <a:r>
-              <a:rPr sz="1600" b="1">
+              <a:rPr sz="1800" b="1">
                 <a:solidFill>
                   <a:srgbClr val="15375F"/>
                 </a:solidFill>
@@ -3871,10 +3415,10 @@
       </p:sp>
       <p:sp>
         <p:nvSpPr>
-          <p:cNvPr id="64" name="关键洞察-item-1">
-            <a:extLst xmlns:a="http://schemas.openxmlformats.org/drawingml/2006/main">
-              <a:ext uri="{FF2B5EF4-FFF2-40B4-BE49-F238E27FC236}">
-                <a16:creationId xmlns:a16="http://schemas.microsoft.com/office/drawing/2014/main" id="{AD7423E0-6C04-41B7-952C-742712F0BFCE}"/>
+          <p:cNvPr id="54" name="关键洞察-item-1">
+            <a:extLst xmlns:a="http://schemas.openxmlformats.org/drawingml/2006/main">
+              <a:ext uri="{FF2B5EF4-FFF2-40B4-BE49-F238E27FC236}">
+                <a16:creationId xmlns:a16="http://schemas.microsoft.com/office/drawing/2014/main" id="{EB23DFC2-7D84-4545-84A3-2B4678DD6860}"/>
               </a:ext>
             </a:extLst>
           </p:cNvPr>
@@ -3888,10 +3432,8 @@
             <a:off x="9144000" y="1771650"/>
             <a:ext cx="2381250" cy="914400"/>
           </a:xfrm>
-          <a:prstGeom xmlns:a="http://schemas.openxmlformats.org/drawingml/2006/main" prst="roundRect">
-            <a:avLst>
-              <a:gd name="adj" fmla="val 8333"/>
-            </a:avLst>
+          <a:prstGeom xmlns:a="http://schemas.openxmlformats.org/drawingml/2006/main" prst="rect">
+            <a:avLst/>
           </a:prstGeom>
           <a:solidFill xmlns:a="http://schemas.openxmlformats.org/drawingml/2006/main">
             <a:srgbClr val="FFFFFF"/>
@@ -3904,7 +3446,9 @@
           </a:ln>
         </p:spPr>
         <p:txBody>
-          <a:bodyPr xmlns:a="http://schemas.openxmlformats.org/drawingml/2006/main" anchor="ctr"/>
+          <a:bodyPr xmlns:a="http://schemas.openxmlformats.org/drawingml/2006/main" wrap="square" lIns="38100" tIns="19050" rIns="38100" bIns="19050" anchor="ctr">
+            <a:noAutofit/>
+          </a:bodyPr>
           <a:lstStyle xmlns:a="http://schemas.openxmlformats.org/drawingml/2006/main"/>
           <a:p xmlns:a="http://schemas.openxmlformats.org/drawingml/2006/main">
             <a:pPr algn="l">
@@ -3927,10 +3471,10 @@
       </p:sp>
       <p:sp>
         <p:nvSpPr>
-          <p:cNvPr id="65" name="关键洞察-item-2">
-            <a:extLst xmlns:a="http://schemas.openxmlformats.org/drawingml/2006/main">
-              <a:ext uri="{FF2B5EF4-FFF2-40B4-BE49-F238E27FC236}">
-                <a16:creationId xmlns:a16="http://schemas.microsoft.com/office/drawing/2014/main" id="{A31C880D-D454-46F4-8156-E09C92B3384A}"/>
+          <p:cNvPr id="55" name="关键洞察-item-2">
+            <a:extLst xmlns:a="http://schemas.openxmlformats.org/drawingml/2006/main">
+              <a:ext uri="{FF2B5EF4-FFF2-40B4-BE49-F238E27FC236}">
+                <a16:creationId xmlns:a16="http://schemas.microsoft.com/office/drawing/2014/main" id="{6489918B-9D58-469C-B9CA-295C25725A6D}"/>
               </a:ext>
             </a:extLst>
           </p:cNvPr>
@@ -3944,10 +3488,8 @@
             <a:off x="9144000" y="2933700"/>
             <a:ext cx="2381250" cy="914400"/>
           </a:xfrm>
-          <a:prstGeom xmlns:a="http://schemas.openxmlformats.org/drawingml/2006/main" prst="roundRect">
-            <a:avLst>
-              <a:gd name="adj" fmla="val 8333"/>
-            </a:avLst>
+          <a:prstGeom xmlns:a="http://schemas.openxmlformats.org/drawingml/2006/main" prst="rect">
+            <a:avLst/>
           </a:prstGeom>
           <a:solidFill xmlns:a="http://schemas.openxmlformats.org/drawingml/2006/main">
             <a:srgbClr val="FFFFFF"/>
@@ -3960,7 +3502,9 @@
           </a:ln>
         </p:spPr>
         <p:txBody>
-          <a:bodyPr xmlns:a="http://schemas.openxmlformats.org/drawingml/2006/main" anchor="ctr"/>
+          <a:bodyPr xmlns:a="http://schemas.openxmlformats.org/drawingml/2006/main" wrap="square" lIns="38100" tIns="19050" rIns="38100" bIns="19050" anchor="ctr">
+            <a:noAutofit/>
+          </a:bodyPr>
           <a:lstStyle xmlns:a="http://schemas.openxmlformats.org/drawingml/2006/main"/>
           <a:p xmlns:a="http://schemas.openxmlformats.org/drawingml/2006/main">
             <a:pPr algn="l">
@@ -3983,10 +3527,10 @@
       </p:sp>
       <p:sp>
         <p:nvSpPr>
-          <p:cNvPr id="66" name="关键洞察-item-3">
-            <a:extLst xmlns:a="http://schemas.openxmlformats.org/drawingml/2006/main">
-              <a:ext uri="{FF2B5EF4-FFF2-40B4-BE49-F238E27FC236}">
-                <a16:creationId xmlns:a16="http://schemas.microsoft.com/office/drawing/2014/main" id="{95C60500-730F-4D95-9C8A-73B5DB7A64A3}"/>
+          <p:cNvPr id="56" name="关键洞察-item-3">
+            <a:extLst xmlns:a="http://schemas.openxmlformats.org/drawingml/2006/main">
+              <a:ext uri="{FF2B5EF4-FFF2-40B4-BE49-F238E27FC236}">
+                <a16:creationId xmlns:a16="http://schemas.microsoft.com/office/drawing/2014/main" id="{9863F606-0554-4234-BB98-965DDEFC7654}"/>
               </a:ext>
             </a:extLst>
           </p:cNvPr>
@@ -4000,10 +3544,8 @@
             <a:off x="9144000" y="4095750"/>
             <a:ext cx="2381250" cy="914400"/>
           </a:xfrm>
-          <a:prstGeom xmlns:a="http://schemas.openxmlformats.org/drawingml/2006/main" prst="roundRect">
-            <a:avLst>
-              <a:gd name="adj" fmla="val 8333"/>
-            </a:avLst>
+          <a:prstGeom xmlns:a="http://schemas.openxmlformats.org/drawingml/2006/main" prst="rect">
+            <a:avLst/>
           </a:prstGeom>
           <a:solidFill xmlns:a="http://schemas.openxmlformats.org/drawingml/2006/main">
             <a:srgbClr val="FFFFFF"/>
@@ -4016,7 +3558,9 @@
           </a:ln>
         </p:spPr>
         <p:txBody>
-          <a:bodyPr xmlns:a="http://schemas.openxmlformats.org/drawingml/2006/main" anchor="ctr"/>
+          <a:bodyPr xmlns:a="http://schemas.openxmlformats.org/drawingml/2006/main" wrap="square" lIns="38100" tIns="19050" rIns="38100" bIns="19050" anchor="ctr">
+            <a:noAutofit/>
+          </a:bodyPr>
           <a:lstStyle xmlns:a="http://schemas.openxmlformats.org/drawingml/2006/main"/>
           <a:p xmlns:a="http://schemas.openxmlformats.org/drawingml/2006/main">
             <a:pPr algn="l">
@@ -4039,10 +3583,10 @@
       </p:sp>
       <p:sp>
         <p:nvSpPr>
-          <p:cNvPr id="67" name="bottom-conclusion">
-            <a:extLst xmlns:a="http://schemas.openxmlformats.org/drawingml/2006/main">
-              <a:ext uri="{FF2B5EF4-FFF2-40B4-BE49-F238E27FC236}">
-                <a16:creationId xmlns:a16="http://schemas.microsoft.com/office/drawing/2014/main" id="{ECD5DABD-1150-4D39-9E28-983894723E51}"/>
+          <p:cNvPr id="57" name="bottom-conclusion">
+            <a:extLst xmlns:a="http://schemas.openxmlformats.org/drawingml/2006/main">
+              <a:ext uri="{FF2B5EF4-FFF2-40B4-BE49-F238E27FC236}">
+                <a16:creationId xmlns:a16="http://schemas.microsoft.com/office/drawing/2014/main" id="{59FA3295-F102-4879-A834-83039E98E5C5}"/>
               </a:ext>
             </a:extLst>
           </p:cNvPr>
@@ -4056,10 +3600,8 @@
             <a:off x="514350" y="5905500"/>
             <a:ext cx="11163300" cy="419100"/>
           </a:xfrm>
-          <a:prstGeom xmlns:a="http://schemas.openxmlformats.org/drawingml/2006/main" prst="roundRect">
-            <a:avLst>
-              <a:gd name="adj" fmla="val 18182"/>
-            </a:avLst>
+          <a:prstGeom xmlns:a="http://schemas.openxmlformats.org/drawingml/2006/main" prst="rect">
+            <a:avLst/>
           </a:prstGeom>
           <a:solidFill xmlns:a="http://schemas.openxmlformats.org/drawingml/2006/main">
             <a:srgbClr val="FFF0E2"/>
@@ -4072,18 +3614,20 @@
           </a:ln>
         </p:spPr>
         <p:txBody>
-          <a:bodyPr xmlns:a="http://schemas.openxmlformats.org/drawingml/2006/main" anchor="ctr"/>
+          <a:bodyPr xmlns:a="http://schemas.openxmlformats.org/drawingml/2006/main" wrap="square" lIns="38100" tIns="19050" rIns="38100" bIns="19050" anchor="ctr">
+            <a:noAutofit/>
+          </a:bodyPr>
           <a:lstStyle xmlns:a="http://schemas.openxmlformats.org/drawingml/2006/main"/>
           <a:p xmlns:a="http://schemas.openxmlformats.org/drawingml/2006/main">
             <a:pPr algn="ctr">
-              <a:defRPr sz="1600" b="1">
+              <a:defRPr sz="1800" b="1">
                 <a:solidFill>
                   <a:srgbClr val="15375F"/>
                 </a:solidFill>
               </a:defRPr>
             </a:pPr>
             <a:r>
-              <a:rPr sz="1600" b="1">
+              <a:rPr sz="1800" b="1">
                 <a:solidFill>
                   <a:srgbClr val="15375F"/>
                 </a:solidFill>
@@ -4096,7 +3640,7 @@
     </p:spTree>
     <p:extLst>
       <p:ext uri="{BB962C8B-B14F-4D97-AF65-F5344CB8AC3E}">
-        <p14:creationId xmlns:p14="http://schemas.microsoft.com/office/powerpoint/2010/main" val="1703786841"/>
+        <p14:creationId xmlns:p14="http://schemas.microsoft.com/office/powerpoint/2010/main" val="379820797"/>
       </p:ext>
     </p:extLst>
   </p:cSld>
